--- a/assets/courses/ai-augmented-se/FPGAPA_AIAugmentedSE_Week01_The_AI_Augmented_Problem.pptx
+++ b/assets/courses/ai-augmented-se/FPGAPA_AIAugmentedSE_Week01_The_AI_Augmented_Problem.pptx
@@ -11,6 +11,11 @@
     <p:sldId id="259" r:id="rId5"/>
     <p:sldId id="260" r:id="rId6"/>
     <p:sldId id="261" r:id="rId7"/>
+    <p:sldId id="266" r:id="rId17"/>
+    <p:sldId id="267" r:id="rId18"/>
+    <p:sldId id="268" r:id="rId19"/>
+    <p:sldId id="269" r:id="rId20"/>
+    <p:sldId id="270" r:id="rId21"/>
     <p:sldId id="262" r:id="rId8"/>
     <p:sldId id="263" r:id="rId9"/>
     <p:sldId id="264" r:id="rId10"/>
@@ -1695,6 +1700,10 @@
           </a:solidFill>
           <a:ln/>
         </p:spPr>
+        <p:txBody>
+          <a:bodyPr/>
+          <a:p/>
+        </p:txBody>
       </p:sp>
       <p:sp>
         <p:nvSpPr>
@@ -1715,6 +1724,10 @@
           </a:solidFill>
           <a:ln/>
         </p:spPr>
+        <p:txBody>
+          <a:bodyPr/>
+          <a:p/>
+        </p:txBody>
       </p:sp>
       <p:sp>
         <p:nvSpPr>
@@ -1742,6 +1755,10 @@
             </a:outerShdw>
           </a:effectLst>
         </p:spPr>
+        <p:txBody>
+          <a:bodyPr/>
+          <a:p/>
+        </p:txBody>
       </p:sp>
       <p:pic>
         <p:nvPicPr>
@@ -1839,7 +1856,7 @@
                 <a:ea typeface="Calibri" pitchFamily="34" charset="-122"/>
                 <a:cs typeface="Calibri" pitchFamily="34" charset="-120"/>
               </a:rPr>
-              <a:t>WEEK 1 OF 15</a:t>
+              <a:t>WEEK 1</a:t>
             </a:r>
             <a:endParaRPr lang="en-US" sz="1300" dirty="0"/>
           </a:p>
@@ -2812,7 +2829,2771 @@
                 <a:ea typeface="Calibri" pitchFamily="34" charset="-122"/>
                 <a:cs typeface="Calibri" pitchFamily="34" charset="-120"/>
               </a:rPr>
+              <a:t>15</a:t>
+            </a:r>
+            <a:endParaRPr lang="en-US" sz="900" dirty="0"/>
+          </a:p>
+        </p:txBody>
+      </p:sp>
+    </p:spTree>
+  </p:cSld>
+  <p:clrMapOvr>
+    <a:masterClrMapping/>
+  </p:clrMapOvr>
+</p:sld>
+</file>
+
+<file path=ppt/slides/slide11.xml><?xml version="1.0" encoding="utf-8"?>
+<p:sld xmlns:a="http://schemas.openxmlformats.org/drawingml/2006/main" xmlns:p="http://schemas.openxmlformats.org/presentationml/2006/main" xmlns:r="http://schemas.openxmlformats.org/officeDocument/2006/relationships">
+  <p:cSld>
+    <p:spTree>
+      <p:nvGrpSpPr>
+        <p:cNvPr id="1" name=""/>
+        <p:cNvGrpSpPr/>
+        <p:nvPr/>
+      </p:nvGrpSpPr>
+      <p:grpSpPr/>
+      <p:sp>
+        <p:nvSpPr>
+          <p:cNvPr id="2" name="Shape 0"/>
+          <p:cNvSpPr/>
+          <p:nvPr/>
+        </p:nvSpPr>
+        <p:spPr>
+          <a:xfrm>
+            <a:off x="502920" y="457200"/>
+            <a:ext cx="640080" cy="640080"/>
+          </a:xfrm>
+          <a:prstGeom prst="ellipse">
+            <a:avLst/>
+          </a:prstGeom>
+          <a:solidFill>
+            <a:srgbClr val="17233D"/>
+          </a:solidFill>
+          <a:ln/>
+          <a:effectLst>
+            <a:outerShdw sx="100000" sy="100000" kx="0" ky="0" algn="bl" rotWithShape="0" blurRad="88900" dist="25400" dir="5400000">
+              <a:srgbClr val="000000">
+                <a:alpha val="12000"/>
+              </a:srgbClr>
+            </a:outerShdw>
+          </a:effectLst>
+        </p:spPr>
+        <p:txBody>
+          <a:bodyPr/>
+          <a:p/>
+        </p:txBody>
+      </p:sp>
+      <p:pic>
+        <p:nvPicPr>
+          <p:cNvPr id="3" name="Image 0" descr="preencoded.png">    </p:cNvPr>
+          <p:cNvPicPr>
+            <a:picLocks noChangeAspect="1"/>
+          </p:cNvPicPr>
+          <p:nvPr/>
+        </p:nvPicPr>
+        <p:blipFill>
+          <a:blip r:embed="rId2"/>
+          <a:stretch>
+            <a:fillRect/>
+          </a:stretch>
+        </p:blipFill>
+        <p:spPr>
+          <a:xfrm>
+            <a:off x="656539" y="610819"/>
+            <a:ext cx="332842" cy="332842"/>
+          </a:xfrm>
+          <a:prstGeom prst="rect">
+            <a:avLst/>
+          </a:prstGeom>
+        </p:spPr>
+      </p:pic>
+      <p:sp>
+        <p:nvSpPr>
+          <p:cNvPr id="4" name="Text 1"/>
+          <p:cNvSpPr/>
+          <p:nvPr/>
+        </p:nvSpPr>
+        <p:spPr>
+          <a:xfrm>
+            <a:off x="1280160" y="420624"/>
+            <a:ext cx="10058400" cy="256032"/>
+          </a:xfrm>
+          <a:prstGeom prst="rect">
+            <a:avLst/>
+          </a:prstGeom>
+          <a:noFill/>
+          <a:ln/>
+        </p:spPr>
+        <p:txBody>
+          <a:bodyPr wrap="square" lIns="0" tIns="0" rIns="0" bIns="0" rtlCol="0" anchor="ctr"/>
+          <a:lstStyle/>
+          <a:p>
+            <a:pPr indent="0" marL="0">
+              <a:buNone/>
+            </a:pPr>
+            <a:r>
+              <a:rPr lang="en-US" sz="1100" b="1" spc="200" kern="0" dirty="0">
+                <a:solidFill>
+                  <a:srgbClr val="CC0035"/>
+                </a:solidFill>
+                <a:latin typeface="Calibri" pitchFamily="34" charset="0"/>
+                <a:ea typeface="Calibri" pitchFamily="34" charset="-122"/>
+                <a:cs typeface="Calibri" pitchFamily="34" charset="-120"/>
+              </a:rPr>
+              <a:t>WEEK 1 · THE SHIFT</a:t>
+            </a:r>
+            <a:endParaRPr lang="en-US" sz="1100" dirty="0"/>
+          </a:p>
+        </p:txBody>
+      </p:sp>
+      <p:sp>
+        <p:nvSpPr>
+          <p:cNvPr id="5" name="Text 2"/>
+          <p:cNvSpPr/>
+          <p:nvPr/>
+        </p:nvSpPr>
+        <p:spPr>
+          <a:xfrm>
+            <a:off x="1280160" y="658368"/>
+            <a:ext cx="10332720" cy="566928"/>
+          </a:xfrm>
+          <a:prstGeom prst="rect">
+            <a:avLst/>
+          </a:prstGeom>
+          <a:noFill/>
+          <a:ln/>
+        </p:spPr>
+        <p:txBody>
+          <a:bodyPr wrap="square" lIns="0" tIns="0" rIns="0" bIns="0" rtlCol="0" anchor="ctr"/>
+          <a:lstStyle/>
+          <a:p>
+            <a:pPr indent="0" marL="0">
+              <a:buNone/>
+            </a:pPr>
+            <a:r>
+              <a:rPr lang="en-US" sz="2400" b="1" dirty="0">
+                <a:solidFill>
+                  <a:srgbClr val="17233D"/>
+                </a:solidFill>
+                <a:latin typeface="Cambria" pitchFamily="34" charset="0"/>
+                <a:ea typeface="Cambria" pitchFamily="34" charset="-122"/>
+                <a:cs typeface="Cambria" pitchFamily="34" charset="-120"/>
+              </a:rPr>
+              <a:t>From Implementor to Systems Engineer</a:t>
+            </a:r>
+            <a:endParaRPr lang="en-US" sz="2400" dirty="0"/>
+          </a:p>
+        </p:txBody>
+      </p:sp>
+      <p:sp>
+        <p:nvSpPr>
+          <p:cNvPr id="6" name="Shape 3"/>
+          <p:cNvSpPr/>
+          <p:nvPr/>
+        </p:nvSpPr>
+        <p:spPr>
+          <a:xfrm>
+            <a:off x="502920" y="1389888"/>
+            <a:ext cx="11183112" cy="0"/>
+          </a:xfrm>
+          <a:prstGeom prst="line">
+            <a:avLst/>
+          </a:prstGeom>
+          <a:noFill/>
+          <a:ln w="12700">
+            <a:solidFill>
+              <a:srgbClr val="D8DEE9"/>
+            </a:solidFill>
+            <a:prstDash val="solid"/>
+          </a:ln>
+        </p:spPr>
+        <p:txBody>
+          <a:bodyPr/>
+          <a:p/>
+        </p:txBody>
+      </p:sp>
+      <p:sp>
+        <p:nvSpPr>
+          <p:cNvPr id="19" name="Text 16"/>
+          <p:cNvSpPr/>
+          <p:nvPr/>
+        </p:nvSpPr>
+        <p:spPr>
+          <a:xfrm>
+            <a:off x="502920" y="6473952"/>
+            <a:ext cx="8686800" cy="274320"/>
+          </a:xfrm>
+          <a:prstGeom prst="rect">
+            <a:avLst/>
+          </a:prstGeom>
+          <a:noFill/>
+          <a:ln/>
+        </p:spPr>
+        <p:txBody>
+          <a:bodyPr wrap="square" lIns="0" tIns="0" rIns="0" bIns="0" rtlCol="0" anchor="ctr"/>
+          <a:lstStyle/>
+          <a:p>
+            <a:pPr algn="l" indent="0" marL="0">
+              <a:buNone/>
+            </a:pPr>
+            <a:r>
+              <a:rPr lang="en-US" sz="900" b="1" dirty="0">
+                <a:solidFill>
+                  <a:srgbClr val="3E5C89"/>
+                </a:solidFill>
+                <a:latin typeface="Calibri" pitchFamily="34" charset="0"/>
+                <a:ea typeface="Calibri" pitchFamily="34" charset="-122"/>
+                <a:cs typeface="Calibri" pitchFamily="34" charset="-120"/>
+              </a:rPr>
+              <a:t>FPGA Professional Association</a:t>
+            </a:r>
+            <a:pPr algn="l" indent="0" marL="0">
+              <a:buNone/>
+            </a:pPr>
+            <a:r>
+              <a:rPr lang="en-US" sz="900" dirty="0">
+                <a:solidFill>
+                  <a:srgbClr val="6B7488"/>
+                </a:solidFill>
+                <a:latin typeface="Calibri" pitchFamily="34" charset="0"/>
+                <a:ea typeface="Calibri" pitchFamily="34" charset="-122"/>
+                <a:cs typeface="Calibri" pitchFamily="34" charset="-120"/>
+              </a:rPr>
+              <a:t>  ·  AI-Augmented Systems Engineering  ·  Week 1</a:t>
+            </a:r>
+            <a:endParaRPr lang="en-US" sz="900" dirty="0"/>
+          </a:p>
+        </p:txBody>
+      </p:sp>
+      <p:sp>
+        <p:nvSpPr>
+          <p:cNvPr id="20" name="Text 17"/>
+          <p:cNvSpPr/>
+          <p:nvPr/>
+        </p:nvSpPr>
+        <p:spPr>
+          <a:xfrm>
+            <a:off x="11155680" y="6473952"/>
+            <a:ext cx="548640" cy="274320"/>
+          </a:xfrm>
+          <a:prstGeom prst="rect">
+            <a:avLst/>
+          </a:prstGeom>
+          <a:noFill/>
+          <a:ln/>
+        </p:spPr>
+        <p:txBody>
+          <a:bodyPr wrap="square" lIns="0" tIns="0" rIns="0" bIns="0" rtlCol="0" anchor="ctr"/>
+          <a:lstStyle/>
+          <a:p>
+            <a:pPr algn="r" indent="0" marL="0">
+              <a:buNone/>
+            </a:pPr>
+            <a:r>
+              <a:rPr lang="en-US" sz="900" dirty="0">
+                <a:solidFill>
+                  <a:srgbClr val="6B7488"/>
+                </a:solidFill>
+                <a:latin typeface="Calibri" pitchFamily="34" charset="0"/>
+                <a:ea typeface="Calibri" pitchFamily="34" charset="-122"/>
+                <a:cs typeface="Calibri" pitchFamily="34" charset="-120"/>
+              </a:rPr>
+              <a:t>7</a:t>
+            </a:r>
+            <a:endParaRPr lang="en-US" sz="900" dirty="0"/>
+          </a:p>
+        </p:txBody>
+      </p:sp>
+      <p:pic>
+        <p:nvPicPr>
+          <p:cNvPr id="21" name="Picture 20" descr="ladder.png"/>
+          <p:cNvPicPr>
+            <a:picLocks noChangeAspect="1"/>
+          </p:cNvPicPr>
+          <p:nvPr/>
+        </p:nvPicPr>
+        <p:blipFill>
+          <a:blip r:embed="rId4"/>
+          <a:stretch>
+            <a:fillRect/>
+          </a:stretch>
+        </p:blipFill>
+        <p:spPr>
+          <a:xfrm>
+            <a:off x="566928" y="1737360"/>
+            <a:ext cx="3583709" cy="4434840"/>
+          </a:xfrm>
+          <a:prstGeom prst="rect">
+            <a:avLst/>
+          </a:prstGeom>
+        </p:spPr>
+      </p:pic>
+      <p:sp>
+        <p:nvSpPr>
+          <p:cNvPr id="22" name="TextBox 21"/>
+          <p:cNvSpPr txBox="1"/>
+          <p:nvPr/>
+        </p:nvSpPr>
+        <p:spPr>
+          <a:xfrm>
+            <a:off x="4617720" y="1810512"/>
+            <a:ext cx="6949440" cy="731520"/>
+          </a:xfrm>
+          <a:prstGeom prst="rect">
+            <a:avLst/>
+          </a:prstGeom>
+          <a:noFill/>
+        </p:spPr>
+        <p:txBody>
+          <a:bodyPr wrap="square">
+            <a:spAutoFit/>
+          </a:bodyPr>
+          <a:lstStyle/>
+          <a:p>
+            <a:r>
+              <a:rPr sz="1800" b="1">
+                <a:solidFill>
+                  <a:srgbClr val="17233D"/>
+                </a:solidFill>
+                <a:latin typeface="Cambria"/>
+              </a:rPr>
+              <a:t>Directing AI is a promotion, not just a speed-up.</a:t>
+            </a:r>
+          </a:p>
+        </p:txBody>
+      </p:sp>
+      <p:sp>
+        <p:nvSpPr>
+          <p:cNvPr id="23" name="TextBox 22"/>
+          <p:cNvSpPr txBox="1"/>
+          <p:nvPr/>
+        </p:nvSpPr>
+        <p:spPr>
+          <a:xfrm>
+            <a:off x="4617720" y="2697480"/>
+            <a:ext cx="6949440" cy="3200400"/>
+          </a:xfrm>
+          <a:prstGeom prst="rect">
+            <a:avLst/>
+          </a:prstGeom>
+          <a:noFill/>
+        </p:spPr>
+        <p:txBody>
+          <a:bodyPr wrap="square">
+            <a:spAutoFit/>
+          </a:bodyPr>
+          <a:lstStyle/>
+          <a:p>
+            <a:pPr>
+              <a:spcAft>
+                <a:spcPts val="1000"/>
+              </a:spcAft>
+            </a:pPr>
+            <a:r>
+              <a:rPr sz="1350" b="0">
+                <a:solidFill>
+                  <a:srgbClr val="1C2434"/>
+                </a:solidFill>
+                <a:latin typeface="Calibri"/>
+              </a:rPr>
+              <a:t>For most of engineering's history, most engineers were implementors: given a specification, they produced the artifact — the code, the RTL, the drawing, the analysis.</a:t>
+            </a:r>
+          </a:p>
+          <a:p>
+            <a:pPr>
+              <a:spcAft>
+                <a:spcPts val="1000"/>
+              </a:spcAft>
+            </a:pPr>
+            <a:r>
+              <a:rPr sz="1350" b="0">
+                <a:solidFill>
+                  <a:srgbClr val="1C2434"/>
+                </a:solidFill>
+                <a:latin typeface="Calibri"/>
+              </a:rPr>
+              <a:t>A model now drafts that artifact in seconds. What stays scarce is everything above it: deciding what to build, defining the interfaces, allocating each function, and proving the whole meets the need.</a:t>
+            </a:r>
+          </a:p>
+          <a:p>
+            <a:r>
+              <a:rPr sz="1350" b="0">
+                <a:solidFill>
+                  <a:srgbClr val="17233D"/>
+                </a:solidFill>
+                <a:latin typeface="Calibri"/>
+              </a:rPr>
+              <a:t>That upper region is systems engineering. Using AI to generate work faster pushes every engineer, at least in part, into the systems engineer's role — and hands them its harder problem: managing the complexity that speed creates.</a:t>
+            </a:r>
+          </a:p>
+        </p:txBody>
+      </p:sp>
+      <p:sp>
+        <p:nvSpPr>
+          <p:cNvPr id="24" name="Rounded Rectangle 23"/>
+          <p:cNvSpPr/>
+          <p:nvPr/>
+        </p:nvSpPr>
+        <p:spPr>
+          <a:xfrm>
+            <a:off x="4617720" y="4572000"/>
+            <a:ext cx="6949440" cy="1371600"/>
+          </a:xfrm>
+          <a:prstGeom prst="roundRect">
+            <a:avLst/>
+          </a:prstGeom>
+          <a:solidFill>
+            <a:srgbClr val="EFF3F9"/>
+          </a:solidFill>
+          <a:ln>
+            <a:noFill/>
+          </a:ln>
+          <a:effectLst/>
+        </p:spPr>
+        <p:style>
+          <a:lnRef idx="1">
+            <a:schemeClr val="accent1"/>
+          </a:lnRef>
+          <a:fillRef idx="3">
+            <a:schemeClr val="accent1"/>
+          </a:fillRef>
+          <a:effectRef idx="2">
+            <a:schemeClr val="accent1"/>
+          </a:effectRef>
+          <a:fontRef idx="minor">
+            <a:schemeClr val="lt1"/>
+          </a:fontRef>
+        </p:style>
+        <p:txBody>
+          <a:bodyPr rtlCol="0" anchor="ctr" wrap="square" lIns="256032" rIns="256032" tIns="146304" bIns="146304"/>
+          <a:lstStyle/>
+          <a:p>
+            <a:pPr algn="ctr"/>
+            <a:r>
+              <a:rPr sz="1350" b="1">
+                <a:solidFill>
+                  <a:srgbClr val="CC0035"/>
+                </a:solidFill>
+                <a:latin typeface="Cambria"/>
+              </a:rPr>
+              <a:t>Where this course lives.  </a:t>
+            </a:r>
+            <a:r>
+              <a:rPr sz="1350">
+                <a:solidFill>
+                  <a:srgbClr val="1C2434"/>
+                </a:solidFill>
+                <a:latin typeface="Calibri"/>
+              </a:rPr>
+              <a:t>The weeks ahead are a guided tour of that upper region — requirements, architecture, verification, risk, and the human role that keeps it accountable.</a:t>
+            </a:r>
+          </a:p>
+        </p:txBody>
+      </p:sp>
+    </p:spTree>
+  </p:cSld>
+  <p:clrMapOvr>
+    <a:masterClrMapping/>
+  </p:clrMapOvr>
+</p:sld>
+</file>
+
+<file path=ppt/slides/slide12.xml><?xml version="1.0" encoding="utf-8"?>
+<p:sld xmlns:a="http://schemas.openxmlformats.org/drawingml/2006/main" xmlns:p="http://schemas.openxmlformats.org/presentationml/2006/main" xmlns:r="http://schemas.openxmlformats.org/officeDocument/2006/relationships">
+  <p:cSld>
+    <p:spTree>
+      <p:nvGrpSpPr>
+        <p:cNvPr id="1" name=""/>
+        <p:cNvGrpSpPr/>
+        <p:nvPr/>
+      </p:nvGrpSpPr>
+      <p:grpSpPr/>
+      <p:sp>
+        <p:nvSpPr>
+          <p:cNvPr id="2" name="Shape 0"/>
+          <p:cNvSpPr/>
+          <p:nvPr/>
+        </p:nvSpPr>
+        <p:spPr>
+          <a:xfrm>
+            <a:off x="502920" y="457200"/>
+            <a:ext cx="640080" cy="640080"/>
+          </a:xfrm>
+          <a:prstGeom prst="ellipse">
+            <a:avLst/>
+          </a:prstGeom>
+          <a:solidFill>
+            <a:srgbClr val="17233D"/>
+          </a:solidFill>
+          <a:ln/>
+          <a:effectLst>
+            <a:outerShdw sx="100000" sy="100000" kx="0" ky="0" algn="bl" rotWithShape="0" blurRad="88900" dist="25400" dir="5400000">
+              <a:srgbClr val="000000">
+                <a:alpha val="12000"/>
+              </a:srgbClr>
+            </a:outerShdw>
+          </a:effectLst>
+        </p:spPr>
+        <p:txBody>
+          <a:bodyPr/>
+          <a:p/>
+        </p:txBody>
+      </p:sp>
+      <p:pic>
+        <p:nvPicPr>
+          <p:cNvPr id="3" name="Image 0" descr="preencoded.png">    </p:cNvPr>
+          <p:cNvPicPr>
+            <a:picLocks noChangeAspect="1"/>
+          </p:cNvPicPr>
+          <p:nvPr/>
+        </p:nvPicPr>
+        <p:blipFill>
+          <a:blip r:embed="rId2"/>
+          <a:stretch>
+            <a:fillRect/>
+          </a:stretch>
+        </p:blipFill>
+        <p:spPr>
+          <a:xfrm>
+            <a:off x="656539" y="610819"/>
+            <a:ext cx="332842" cy="332842"/>
+          </a:xfrm>
+          <a:prstGeom prst="rect">
+            <a:avLst/>
+          </a:prstGeom>
+        </p:spPr>
+      </p:pic>
+      <p:sp>
+        <p:nvSpPr>
+          <p:cNvPr id="4" name="Text 1"/>
+          <p:cNvSpPr/>
+          <p:nvPr/>
+        </p:nvSpPr>
+        <p:spPr>
+          <a:xfrm>
+            <a:off x="1280160" y="420624"/>
+            <a:ext cx="10058400" cy="256032"/>
+          </a:xfrm>
+          <a:prstGeom prst="rect">
+            <a:avLst/>
+          </a:prstGeom>
+          <a:noFill/>
+          <a:ln/>
+        </p:spPr>
+        <p:txBody>
+          <a:bodyPr wrap="square" lIns="0" tIns="0" rIns="0" bIns="0" rtlCol="0" anchor="ctr"/>
+          <a:lstStyle/>
+          <a:p>
+            <a:pPr indent="0" marL="0">
+              <a:buNone/>
+            </a:pPr>
+            <a:r>
+              <a:rPr lang="en-US" sz="1100" b="1" spc="200" kern="0" dirty="0">
+                <a:solidFill>
+                  <a:srgbClr val="CC0035"/>
+                </a:solidFill>
+                <a:latin typeface="Calibri" pitchFamily="34" charset="0"/>
+                <a:ea typeface="Calibri" pitchFamily="34" charset="-122"/>
+                <a:cs typeface="Calibri" pitchFamily="34" charset="-120"/>
+              </a:rPr>
+              <a:t>WEEK 1 · THE NEW BOTTLENECK</a:t>
+            </a:r>
+            <a:endParaRPr lang="en-US" sz="1100" dirty="0"/>
+          </a:p>
+        </p:txBody>
+      </p:sp>
+      <p:sp>
+        <p:nvSpPr>
+          <p:cNvPr id="5" name="Text 2"/>
+          <p:cNvSpPr/>
+          <p:nvPr/>
+        </p:nvSpPr>
+        <p:spPr>
+          <a:xfrm>
+            <a:off x="1280160" y="658368"/>
+            <a:ext cx="10332720" cy="566928"/>
+          </a:xfrm>
+          <a:prstGeom prst="rect">
+            <a:avLst/>
+          </a:prstGeom>
+          <a:noFill/>
+          <a:ln/>
+        </p:spPr>
+        <p:txBody>
+          <a:bodyPr wrap="square" lIns="0" tIns="0" rIns="0" bIns="0" rtlCol="0" anchor="ctr"/>
+          <a:lstStyle/>
+          <a:p>
+            <a:pPr indent="0" marL="0">
+              <a:buNone/>
+            </a:pPr>
+            <a:r>
+              <a:rPr lang="en-US" sz="2400" b="1" dirty="0">
+                <a:solidFill>
+                  <a:srgbClr val="17233D"/>
+                </a:solidFill>
+                <a:latin typeface="Cambria" pitchFamily="34" charset="0"/>
+                <a:ea typeface="Cambria" pitchFamily="34" charset="-122"/>
+                <a:cs typeface="Cambria" pitchFamily="34" charset="-120"/>
+              </a:rPr>
+              <a:t>When Making Is Cheap, Managing Is the Job</a:t>
+            </a:r>
+            <a:endParaRPr lang="en-US" sz="2400" dirty="0"/>
+          </a:p>
+        </p:txBody>
+      </p:sp>
+      <p:sp>
+        <p:nvSpPr>
+          <p:cNvPr id="6" name="Shape 3"/>
+          <p:cNvSpPr/>
+          <p:nvPr/>
+        </p:nvSpPr>
+        <p:spPr>
+          <a:xfrm>
+            <a:off x="502920" y="1389888"/>
+            <a:ext cx="11183112" cy="0"/>
+          </a:xfrm>
+          <a:prstGeom prst="line">
+            <a:avLst/>
+          </a:prstGeom>
+          <a:noFill/>
+          <a:ln w="12700">
+            <a:solidFill>
+              <a:srgbClr val="D8DEE9"/>
+            </a:solidFill>
+            <a:prstDash val="solid"/>
+          </a:ln>
+        </p:spPr>
+        <p:txBody>
+          <a:bodyPr/>
+          <a:p/>
+        </p:txBody>
+      </p:sp>
+      <p:sp>
+        <p:nvSpPr>
+          <p:cNvPr id="19" name="Text 16"/>
+          <p:cNvSpPr/>
+          <p:nvPr/>
+        </p:nvSpPr>
+        <p:spPr>
+          <a:xfrm>
+            <a:off x="502920" y="6473952"/>
+            <a:ext cx="8686800" cy="274320"/>
+          </a:xfrm>
+          <a:prstGeom prst="rect">
+            <a:avLst/>
+          </a:prstGeom>
+          <a:noFill/>
+          <a:ln/>
+        </p:spPr>
+        <p:txBody>
+          <a:bodyPr wrap="square" lIns="0" tIns="0" rIns="0" bIns="0" rtlCol="0" anchor="ctr"/>
+          <a:lstStyle/>
+          <a:p>
+            <a:pPr algn="l" indent="0" marL="0">
+              <a:buNone/>
+            </a:pPr>
+            <a:r>
+              <a:rPr lang="en-US" sz="900" b="1" dirty="0">
+                <a:solidFill>
+                  <a:srgbClr val="3E5C89"/>
+                </a:solidFill>
+                <a:latin typeface="Calibri" pitchFamily="34" charset="0"/>
+                <a:ea typeface="Calibri" pitchFamily="34" charset="-122"/>
+                <a:cs typeface="Calibri" pitchFamily="34" charset="-120"/>
+              </a:rPr>
+              <a:t>FPGA Professional Association</a:t>
+            </a:r>
+            <a:pPr algn="l" indent="0" marL="0">
+              <a:buNone/>
+            </a:pPr>
+            <a:r>
+              <a:rPr lang="en-US" sz="900" dirty="0">
+                <a:solidFill>
+                  <a:srgbClr val="6B7488"/>
+                </a:solidFill>
+                <a:latin typeface="Calibri" pitchFamily="34" charset="0"/>
+                <a:ea typeface="Calibri" pitchFamily="34" charset="-122"/>
+                <a:cs typeface="Calibri" pitchFamily="34" charset="-120"/>
+              </a:rPr>
+              <a:t>  ·  AI-Augmented Systems Engineering  ·  Week 1</a:t>
+            </a:r>
+            <a:endParaRPr lang="en-US" sz="900" dirty="0"/>
+          </a:p>
+        </p:txBody>
+      </p:sp>
+      <p:sp>
+        <p:nvSpPr>
+          <p:cNvPr id="20" name="Text 17"/>
+          <p:cNvSpPr/>
+          <p:nvPr/>
+        </p:nvSpPr>
+        <p:spPr>
+          <a:xfrm>
+            <a:off x="11155680" y="6473952"/>
+            <a:ext cx="548640" cy="274320"/>
+          </a:xfrm>
+          <a:prstGeom prst="rect">
+            <a:avLst/>
+          </a:prstGeom>
+          <a:noFill/>
+          <a:ln/>
+        </p:spPr>
+        <p:txBody>
+          <a:bodyPr wrap="square" lIns="0" tIns="0" rIns="0" bIns="0" rtlCol="0" anchor="ctr"/>
+          <a:lstStyle/>
+          <a:p>
+            <a:pPr algn="r" indent="0" marL="0">
+              <a:buNone/>
+            </a:pPr>
+            <a:r>
+              <a:rPr lang="en-US" sz="900" dirty="0">
+                <a:solidFill>
+                  <a:srgbClr val="6B7488"/>
+                </a:solidFill>
+                <a:latin typeface="Calibri" pitchFamily="34" charset="0"/>
+                <a:ea typeface="Calibri" pitchFamily="34" charset="-122"/>
+                <a:cs typeface="Calibri" pitchFamily="34" charset="-120"/>
+              </a:rPr>
+              <a:t>8</a:t>
+            </a:r>
+            <a:endParaRPr lang="en-US" sz="900" dirty="0"/>
+          </a:p>
+        </p:txBody>
+      </p:sp>
+      <p:sp>
+        <p:nvSpPr>
+          <p:cNvPr id="21" name="TextBox 20"/>
+          <p:cNvSpPr txBox="1"/>
+          <p:nvPr/>
+        </p:nvSpPr>
+        <p:spPr>
+          <a:xfrm>
+            <a:off x="502920" y="1517904"/>
+            <a:ext cx="11155680" cy="457200"/>
+          </a:xfrm>
+          <a:prstGeom prst="rect">
+            <a:avLst/>
+          </a:prstGeom>
+          <a:noFill/>
+        </p:spPr>
+        <p:txBody>
+          <a:bodyPr wrap="square">
+            <a:spAutoFit/>
+          </a:bodyPr>
+          <a:lstStyle/>
+          <a:p>
+            <a:r>
+              <a:rPr sz="1400" b="0">
+                <a:solidFill>
+                  <a:srgbClr val="6B7488"/>
+                </a:solidFill>
+                <a:latin typeface="Calibri"/>
+              </a:rPr>
+              <a:t>AI removes much of the cost of producing a part. That does not remove the work — it relocates it to where the difficulty now lives.</a:t>
+            </a:r>
+          </a:p>
+        </p:txBody>
+      </p:sp>
+      <p:pic>
+        <p:nvPicPr>
+          <p:cNvPr id="22" name="Picture 21" descr="bottleneck.png"/>
+          <p:cNvPicPr>
+            <a:picLocks noChangeAspect="1"/>
+          </p:cNvPicPr>
+          <p:nvPr/>
+        </p:nvPicPr>
+        <p:blipFill>
+          <a:blip r:embed="rId4"/>
+          <a:stretch>
+            <a:fillRect/>
+          </a:stretch>
+        </p:blipFill>
+        <p:spPr>
+          <a:xfrm>
+            <a:off x="1069848" y="2148840"/>
+            <a:ext cx="10058400" cy="3907301"/>
+          </a:xfrm>
+          <a:prstGeom prst="rect">
+            <a:avLst/>
+          </a:prstGeom>
+        </p:spPr>
+      </p:pic>
+    </p:spTree>
+  </p:cSld>
+  <p:clrMapOvr>
+    <a:masterClrMapping/>
+  </p:clrMapOvr>
+</p:sld>
+</file>
+
+<file path=ppt/slides/slide13.xml><?xml version="1.0" encoding="utf-8"?>
+<p:sld xmlns:a="http://schemas.openxmlformats.org/drawingml/2006/main" xmlns:p="http://schemas.openxmlformats.org/presentationml/2006/main" xmlns:r="http://schemas.openxmlformats.org/officeDocument/2006/relationships">
+  <p:cSld>
+    <p:spTree>
+      <p:nvGrpSpPr>
+        <p:cNvPr id="1" name=""/>
+        <p:cNvGrpSpPr/>
+        <p:nvPr/>
+      </p:nvGrpSpPr>
+      <p:grpSpPr/>
+      <p:sp>
+        <p:nvSpPr>
+          <p:cNvPr id="2" name="Shape 0"/>
+          <p:cNvSpPr/>
+          <p:nvPr/>
+        </p:nvSpPr>
+        <p:spPr>
+          <a:xfrm>
+            <a:off x="502920" y="457200"/>
+            <a:ext cx="640080" cy="640080"/>
+          </a:xfrm>
+          <a:prstGeom prst="ellipse">
+            <a:avLst/>
+          </a:prstGeom>
+          <a:solidFill>
+            <a:srgbClr val="17233D"/>
+          </a:solidFill>
+          <a:ln/>
+          <a:effectLst>
+            <a:outerShdw sx="100000" sy="100000" kx="0" ky="0" algn="bl" rotWithShape="0" blurRad="88900" dist="25400" dir="5400000">
+              <a:srgbClr val="000000">
+                <a:alpha val="12000"/>
+              </a:srgbClr>
+            </a:outerShdw>
+          </a:effectLst>
+        </p:spPr>
+        <p:txBody>
+          <a:bodyPr/>
+          <a:p/>
+        </p:txBody>
+      </p:sp>
+      <p:pic>
+        <p:nvPicPr>
+          <p:cNvPr id="3" name="Image 0" descr="preencoded.png">    </p:cNvPr>
+          <p:cNvPicPr>
+            <a:picLocks noChangeAspect="1"/>
+          </p:cNvPicPr>
+          <p:nvPr/>
+        </p:nvPicPr>
+        <p:blipFill>
+          <a:blip r:embed="rId2"/>
+          <a:stretch>
+            <a:fillRect/>
+          </a:stretch>
+        </p:blipFill>
+        <p:spPr>
+          <a:xfrm>
+            <a:off x="656539" y="610819"/>
+            <a:ext cx="332842" cy="332842"/>
+          </a:xfrm>
+          <a:prstGeom prst="rect">
+            <a:avLst/>
+          </a:prstGeom>
+        </p:spPr>
+      </p:pic>
+      <p:sp>
+        <p:nvSpPr>
+          <p:cNvPr id="4" name="Text 1"/>
+          <p:cNvSpPr/>
+          <p:nvPr/>
+        </p:nvSpPr>
+        <p:spPr>
+          <a:xfrm>
+            <a:off x="1280160" y="420624"/>
+            <a:ext cx="10058400" cy="256032"/>
+          </a:xfrm>
+          <a:prstGeom prst="rect">
+            <a:avLst/>
+          </a:prstGeom>
+          <a:noFill/>
+          <a:ln/>
+        </p:spPr>
+        <p:txBody>
+          <a:bodyPr wrap="square" lIns="0" tIns="0" rIns="0" bIns="0" rtlCol="0" anchor="ctr"/>
+          <a:lstStyle/>
+          <a:p>
+            <a:pPr indent="0" marL="0">
+              <a:buNone/>
+            </a:pPr>
+            <a:r>
+              <a:rPr lang="en-US" sz="1100" b="1" spc="200" kern="0" dirty="0">
+                <a:solidFill>
+                  <a:srgbClr val="CC0035"/>
+                </a:solidFill>
+                <a:latin typeface="Calibri" pitchFamily="34" charset="0"/>
+                <a:ea typeface="Calibri" pitchFamily="34" charset="-122"/>
+                <a:cs typeface="Calibri" pitchFamily="34" charset="-120"/>
+              </a:rPr>
+              <a:t>WEEK 1 · THE COMPLEXITY TAX</a:t>
+            </a:r>
+            <a:endParaRPr lang="en-US" sz="1100" dirty="0"/>
+          </a:p>
+        </p:txBody>
+      </p:sp>
+      <p:sp>
+        <p:nvSpPr>
+          <p:cNvPr id="5" name="Text 2"/>
+          <p:cNvSpPr/>
+          <p:nvPr/>
+        </p:nvSpPr>
+        <p:spPr>
+          <a:xfrm>
+            <a:off x="1280160" y="658368"/>
+            <a:ext cx="10332720" cy="566928"/>
+          </a:xfrm>
+          <a:prstGeom prst="rect">
+            <a:avLst/>
+          </a:prstGeom>
+          <a:noFill/>
+          <a:ln/>
+        </p:spPr>
+        <p:txBody>
+          <a:bodyPr wrap="square" lIns="0" tIns="0" rIns="0" bIns="0" rtlCol="0" anchor="ctr"/>
+          <a:lstStyle/>
+          <a:p>
+            <a:pPr indent="0" marL="0">
+              <a:buNone/>
+            </a:pPr>
+            <a:r>
+              <a:rPr lang="en-US" sz="2400" b="1" dirty="0">
+                <a:solidFill>
+                  <a:srgbClr val="17233D"/>
+                </a:solidFill>
+                <a:latin typeface="Cambria" pitchFamily="34" charset="0"/>
+                <a:ea typeface="Cambria" pitchFamily="34" charset="-122"/>
+                <a:cs typeface="Cambria" pitchFamily="34" charset="-120"/>
+              </a:rPr>
+              <a:t>More Parts, Many More Interfaces</a:t>
+            </a:r>
+            <a:endParaRPr lang="en-US" sz="2400" dirty="0"/>
+          </a:p>
+        </p:txBody>
+      </p:sp>
+      <p:sp>
+        <p:nvSpPr>
+          <p:cNvPr id="6" name="Shape 3"/>
+          <p:cNvSpPr/>
+          <p:nvPr/>
+        </p:nvSpPr>
+        <p:spPr>
+          <a:xfrm>
+            <a:off x="502920" y="1389888"/>
+            <a:ext cx="11183112" cy="0"/>
+          </a:xfrm>
+          <a:prstGeom prst="line">
+            <a:avLst/>
+          </a:prstGeom>
+          <a:noFill/>
+          <a:ln w="12700">
+            <a:solidFill>
+              <a:srgbClr val="D8DEE9"/>
+            </a:solidFill>
+            <a:prstDash val="solid"/>
+          </a:ln>
+        </p:spPr>
+        <p:txBody>
+          <a:bodyPr/>
+          <a:p/>
+        </p:txBody>
+      </p:sp>
+      <p:sp>
+        <p:nvSpPr>
+          <p:cNvPr id="19" name="Text 16"/>
+          <p:cNvSpPr/>
+          <p:nvPr/>
+        </p:nvSpPr>
+        <p:spPr>
+          <a:xfrm>
+            <a:off x="502920" y="6473952"/>
+            <a:ext cx="8686800" cy="274320"/>
+          </a:xfrm>
+          <a:prstGeom prst="rect">
+            <a:avLst/>
+          </a:prstGeom>
+          <a:noFill/>
+          <a:ln/>
+        </p:spPr>
+        <p:txBody>
+          <a:bodyPr wrap="square" lIns="0" tIns="0" rIns="0" bIns="0" rtlCol="0" anchor="ctr"/>
+          <a:lstStyle/>
+          <a:p>
+            <a:pPr algn="l" indent="0" marL="0">
+              <a:buNone/>
+            </a:pPr>
+            <a:r>
+              <a:rPr lang="en-US" sz="900" b="1" dirty="0">
+                <a:solidFill>
+                  <a:srgbClr val="3E5C89"/>
+                </a:solidFill>
+                <a:latin typeface="Calibri" pitchFamily="34" charset="0"/>
+                <a:ea typeface="Calibri" pitchFamily="34" charset="-122"/>
+                <a:cs typeface="Calibri" pitchFamily="34" charset="-120"/>
+              </a:rPr>
+              <a:t>FPGA Professional Association</a:t>
+            </a:r>
+            <a:pPr algn="l" indent="0" marL="0">
+              <a:buNone/>
+            </a:pPr>
+            <a:r>
+              <a:rPr lang="en-US" sz="900" dirty="0">
+                <a:solidFill>
+                  <a:srgbClr val="6B7488"/>
+                </a:solidFill>
+                <a:latin typeface="Calibri" pitchFamily="34" charset="0"/>
+                <a:ea typeface="Calibri" pitchFamily="34" charset="-122"/>
+                <a:cs typeface="Calibri" pitchFamily="34" charset="-120"/>
+              </a:rPr>
+              <a:t>  ·  AI-Augmented Systems Engineering  ·  Week 1</a:t>
+            </a:r>
+            <a:endParaRPr lang="en-US" sz="900" dirty="0"/>
+          </a:p>
+        </p:txBody>
+      </p:sp>
+      <p:sp>
+        <p:nvSpPr>
+          <p:cNvPr id="20" name="Text 17"/>
+          <p:cNvSpPr/>
+          <p:nvPr/>
+        </p:nvSpPr>
+        <p:spPr>
+          <a:xfrm>
+            <a:off x="11155680" y="6473952"/>
+            <a:ext cx="548640" cy="274320"/>
+          </a:xfrm>
+          <a:prstGeom prst="rect">
+            <a:avLst/>
+          </a:prstGeom>
+          <a:noFill/>
+          <a:ln/>
+        </p:spPr>
+        <p:txBody>
+          <a:bodyPr wrap="square" lIns="0" tIns="0" rIns="0" bIns="0" rtlCol="0" anchor="ctr"/>
+          <a:lstStyle/>
+          <a:p>
+            <a:pPr algn="r" indent="0" marL="0">
+              <a:buNone/>
+            </a:pPr>
+            <a:r>
+              <a:rPr lang="en-US" sz="900" dirty="0">
+                <a:solidFill>
+                  <a:srgbClr val="6B7488"/>
+                </a:solidFill>
+                <a:latin typeface="Calibri" pitchFamily="34" charset="0"/>
+                <a:ea typeface="Calibri" pitchFamily="34" charset="-122"/>
+                <a:cs typeface="Calibri" pitchFamily="34" charset="-120"/>
+              </a:rPr>
+              <a:t>9</a:t>
+            </a:r>
+            <a:endParaRPr lang="en-US" sz="900" dirty="0"/>
+          </a:p>
+        </p:txBody>
+      </p:sp>
+      <p:sp>
+        <p:nvSpPr>
+          <p:cNvPr id="21" name="TextBox 20"/>
+          <p:cNvSpPr txBox="1"/>
+          <p:nvPr/>
+        </p:nvSpPr>
+        <p:spPr>
+          <a:xfrm>
+            <a:off x="502920" y="1517904"/>
+            <a:ext cx="11155680" cy="457200"/>
+          </a:xfrm>
+          <a:prstGeom prst="rect">
+            <a:avLst/>
+          </a:prstGeom>
+          <a:noFill/>
+        </p:spPr>
+        <p:txBody>
+          <a:bodyPr wrap="square">
+            <a:spAutoFit/>
+          </a:bodyPr>
+          <a:lstStyle/>
+          <a:p>
+            <a:r>
+              <a:rPr sz="1400" b="0">
+                <a:solidFill>
+                  <a:srgbClr val="6B7488"/>
+                </a:solidFill>
+                <a:latin typeface="Calibri"/>
+              </a:rPr>
+              <a:t>Every part you add multiplies the interfaces someone must define, verify, and keep consistent. Volume of output buys a rising tax in complexity.</a:t>
+            </a:r>
+          </a:p>
+        </p:txBody>
+      </p:sp>
+      <p:pic>
+        <p:nvPicPr>
+          <p:cNvPr id="22" name="Picture 21" descr="complexity.png"/>
+          <p:cNvPicPr>
+            <a:picLocks noChangeAspect="1"/>
+          </p:cNvPicPr>
+          <p:nvPr/>
+        </p:nvPicPr>
+        <p:blipFill>
+          <a:blip r:embed="rId4"/>
+          <a:stretch>
+            <a:fillRect/>
+          </a:stretch>
+        </p:blipFill>
+        <p:spPr>
+          <a:xfrm>
+            <a:off x="1572768" y="2103120"/>
+            <a:ext cx="9052560" cy="3899564"/>
+          </a:xfrm>
+          <a:prstGeom prst="rect">
+            <a:avLst/>
+          </a:prstGeom>
+        </p:spPr>
+      </p:pic>
+    </p:spTree>
+  </p:cSld>
+  <p:clrMapOvr>
+    <a:masterClrMapping/>
+  </p:clrMapOvr>
+</p:sld>
+</file>
+
+<file path=ppt/slides/slide14.xml><?xml version="1.0" encoding="utf-8"?>
+<p:sld xmlns:a="http://schemas.openxmlformats.org/drawingml/2006/main" xmlns:p="http://schemas.openxmlformats.org/presentationml/2006/main" xmlns:r="http://schemas.openxmlformats.org/officeDocument/2006/relationships">
+  <p:cSld>
+    <p:spTree>
+      <p:nvGrpSpPr>
+        <p:cNvPr id="1" name=""/>
+        <p:cNvGrpSpPr/>
+        <p:nvPr/>
+      </p:nvGrpSpPr>
+      <p:grpSpPr/>
+      <p:sp>
+        <p:nvSpPr>
+          <p:cNvPr id="2" name="Shape 0"/>
+          <p:cNvSpPr/>
+          <p:nvPr/>
+        </p:nvSpPr>
+        <p:spPr>
+          <a:xfrm>
+            <a:off x="502920" y="457200"/>
+            <a:ext cx="640080" cy="640080"/>
+          </a:xfrm>
+          <a:prstGeom prst="ellipse">
+            <a:avLst/>
+          </a:prstGeom>
+          <a:solidFill>
+            <a:srgbClr val="17233D"/>
+          </a:solidFill>
+          <a:ln/>
+          <a:effectLst>
+            <a:outerShdw sx="100000" sy="100000" kx="0" ky="0" algn="bl" rotWithShape="0" blurRad="88900" dist="25400" dir="5400000">
+              <a:srgbClr val="000000">
+                <a:alpha val="12000"/>
+              </a:srgbClr>
+            </a:outerShdw>
+          </a:effectLst>
+        </p:spPr>
+        <p:txBody>
+          <a:bodyPr/>
+          <a:p/>
+        </p:txBody>
+      </p:sp>
+      <p:pic>
+        <p:nvPicPr>
+          <p:cNvPr id="3" name="Image 0" descr="preencoded.png">    </p:cNvPr>
+          <p:cNvPicPr>
+            <a:picLocks noChangeAspect="1"/>
+          </p:cNvPicPr>
+          <p:nvPr/>
+        </p:nvPicPr>
+        <p:blipFill>
+          <a:blip r:embed="rId2"/>
+          <a:stretch>
+            <a:fillRect/>
+          </a:stretch>
+        </p:blipFill>
+        <p:spPr>
+          <a:xfrm>
+            <a:off x="656539" y="610819"/>
+            <a:ext cx="332842" cy="332842"/>
+          </a:xfrm>
+          <a:prstGeom prst="rect">
+            <a:avLst/>
+          </a:prstGeom>
+        </p:spPr>
+      </p:pic>
+      <p:sp>
+        <p:nvSpPr>
+          <p:cNvPr id="4" name="Text 1"/>
+          <p:cNvSpPr/>
+          <p:nvPr/>
+        </p:nvSpPr>
+        <p:spPr>
+          <a:xfrm>
+            <a:off x="1280160" y="420624"/>
+            <a:ext cx="10058400" cy="256032"/>
+          </a:xfrm>
+          <a:prstGeom prst="rect">
+            <a:avLst/>
+          </a:prstGeom>
+          <a:noFill/>
+          <a:ln/>
+        </p:spPr>
+        <p:txBody>
+          <a:bodyPr wrap="square" lIns="0" tIns="0" rIns="0" bIns="0" rtlCol="0" anchor="ctr"/>
+          <a:lstStyle/>
+          <a:p>
+            <a:pPr indent="0" marL="0">
+              <a:buNone/>
+            </a:pPr>
+            <a:r>
+              <a:rPr lang="en-US" sz="1100" b="1" spc="200" kern="0" dirty="0">
+                <a:solidFill>
+                  <a:srgbClr val="CC0035"/>
+                </a:solidFill>
+                <a:latin typeface="Calibri" pitchFamily="34" charset="0"/>
+                <a:ea typeface="Calibri" pitchFamily="34" charset="-122"/>
+                <a:cs typeface="Calibri" pitchFamily="34" charset="-120"/>
+              </a:rPr>
+              <a:t>WEEK 1 · THE SE CRAFT</a:t>
+            </a:r>
+            <a:endParaRPr lang="en-US" sz="1100" dirty="0"/>
+          </a:p>
+        </p:txBody>
+      </p:sp>
+      <p:sp>
+        <p:nvSpPr>
+          <p:cNvPr id="5" name="Text 2"/>
+          <p:cNvSpPr/>
+          <p:nvPr/>
+        </p:nvSpPr>
+        <p:spPr>
+          <a:xfrm>
+            <a:off x="1280160" y="658368"/>
+            <a:ext cx="10332720" cy="566928"/>
+          </a:xfrm>
+          <a:prstGeom prst="rect">
+            <a:avLst/>
+          </a:prstGeom>
+          <a:noFill/>
+          <a:ln/>
+        </p:spPr>
+        <p:txBody>
+          <a:bodyPr wrap="square" lIns="0" tIns="0" rIns="0" bIns="0" rtlCol="0" anchor="ctr"/>
+          <a:lstStyle/>
+          <a:p>
+            <a:pPr indent="0" marL="0">
+              <a:buNone/>
+            </a:pPr>
+            <a:r>
+              <a:rPr lang="en-US" sz="2400" b="1" dirty="0">
+                <a:solidFill>
+                  <a:srgbClr val="17233D"/>
+                </a:solidFill>
+                <a:latin typeface="Cambria" pitchFamily="34" charset="0"/>
+                <a:ea typeface="Cambria" pitchFamily="34" charset="-122"/>
+                <a:cs typeface="Cambria" pitchFamily="34" charset="-120"/>
+              </a:rPr>
+              <a:t>Managing Complexity Is the Systems Engineer's Craft</a:t>
+            </a:r>
+            <a:endParaRPr lang="en-US" sz="2400" dirty="0"/>
+          </a:p>
+        </p:txBody>
+      </p:sp>
+      <p:sp>
+        <p:nvSpPr>
+          <p:cNvPr id="6" name="Shape 3"/>
+          <p:cNvSpPr/>
+          <p:nvPr/>
+        </p:nvSpPr>
+        <p:spPr>
+          <a:xfrm>
+            <a:off x="502920" y="1389888"/>
+            <a:ext cx="11183112" cy="0"/>
+          </a:xfrm>
+          <a:prstGeom prst="line">
+            <a:avLst/>
+          </a:prstGeom>
+          <a:noFill/>
+          <a:ln w="12700">
+            <a:solidFill>
+              <a:srgbClr val="D8DEE9"/>
+            </a:solidFill>
+            <a:prstDash val="solid"/>
+          </a:ln>
+        </p:spPr>
+        <p:txBody>
+          <a:bodyPr/>
+          <a:p/>
+        </p:txBody>
+      </p:sp>
+      <p:sp>
+        <p:nvSpPr>
+          <p:cNvPr id="7" name="Shape 4"/>
+          <p:cNvSpPr/>
+          <p:nvPr/>
+        </p:nvSpPr>
+        <p:spPr>
+          <a:xfrm>
+            <a:off x="502920" y="1828800"/>
+            <a:ext cx="5408676" cy="1920240"/>
+          </a:xfrm>
+          <a:prstGeom prst="roundRect">
+            <a:avLst>
+              <a:gd name="adj" fmla="val 4286"/>
+            </a:avLst>
+          </a:prstGeom>
+          <a:solidFill>
+            <a:srgbClr val="EFF3F9"/>
+          </a:solidFill>
+          <a:ln w="9525">
+            <a:solidFill>
+              <a:srgbClr val="D8DEE9"/>
+            </a:solidFill>
+            <a:prstDash val="solid"/>
+          </a:ln>
+          <a:effectLst>
+            <a:outerShdw sx="100000" sy="100000" kx="0" ky="0" algn="bl" rotWithShape="0" blurRad="88900" dist="25400" dir="5400000">
+              <a:srgbClr val="000000">
+                <a:alpha val="12000"/>
+              </a:srgbClr>
+            </a:outerShdw>
+          </a:effectLst>
+        </p:spPr>
+        <p:txBody>
+          <a:bodyPr/>
+          <a:p/>
+        </p:txBody>
+      </p:sp>
+      <p:sp>
+        <p:nvSpPr>
+          <p:cNvPr id="8" name="Shape 5"/>
+          <p:cNvSpPr/>
+          <p:nvPr/>
+        </p:nvSpPr>
+        <p:spPr>
+          <a:xfrm>
+            <a:off x="758952" y="2103120"/>
+            <a:ext cx="621792" cy="621792"/>
+          </a:xfrm>
+          <a:prstGeom prst="ellipse">
+            <a:avLst/>
+          </a:prstGeom>
+          <a:solidFill>
+            <a:srgbClr val="17233D"/>
+          </a:solidFill>
+          <a:ln/>
+          <a:effectLst>
+            <a:outerShdw sx="100000" sy="100000" kx="0" ky="0" algn="bl" rotWithShape="0" blurRad="88900" dist="25400" dir="5400000">
+              <a:srgbClr val="000000">
+                <a:alpha val="12000"/>
+              </a:srgbClr>
+            </a:outerShdw>
+          </a:effectLst>
+        </p:spPr>
+        <p:txBody>
+          <a:bodyPr/>
+          <a:p/>
+        </p:txBody>
+      </p:sp>
+      <p:sp>
+        <p:nvSpPr>
+          <p:cNvPr id="10" name="Text 6"/>
+          <p:cNvSpPr/>
+          <p:nvPr/>
+        </p:nvSpPr>
+        <p:spPr>
+          <a:xfrm>
+            <a:off x="1554480" y="2103120"/>
+            <a:ext cx="4128516" cy="384048"/>
+          </a:xfrm>
+          <a:prstGeom prst="rect">
+            <a:avLst/>
+          </a:prstGeom>
+          <a:noFill/>
+          <a:ln/>
+        </p:spPr>
+        <p:txBody>
+          <a:bodyPr wrap="square" lIns="0" tIns="0" rIns="0" bIns="0" rtlCol="0" anchor="ctr"/>
+          <a:lstStyle/>
+          <a:p>
+            <a:pPr indent="0" marL="0">
+              <a:buNone/>
+            </a:pPr>
+            <a:r>
+              <a:rPr lang="en-US" sz="1450" b="1" dirty="0">
+                <a:solidFill>
+                  <a:srgbClr val="CC0035"/>
+                </a:solidFill>
+                <a:latin typeface="Cambria" pitchFamily="34" charset="0"/>
+                <a:ea typeface="Cambria" pitchFamily="34" charset="-122"/>
+                <a:cs typeface="Cambria" pitchFamily="34" charset="-120"/>
+              </a:rPr>
+              <a:t>Boundaries &amp; interfaces</a:t>
+            </a:r>
+            <a:endParaRPr lang="en-US" sz="1450" dirty="0"/>
+          </a:p>
+        </p:txBody>
+      </p:sp>
+      <p:sp>
+        <p:nvSpPr>
+          <p:cNvPr id="11" name="Text 7"/>
+          <p:cNvSpPr/>
+          <p:nvPr/>
+        </p:nvSpPr>
+        <p:spPr>
+          <a:xfrm>
+            <a:off x="1554480" y="2523744"/>
+            <a:ext cx="4082796" cy="1005840"/>
+          </a:xfrm>
+          <a:prstGeom prst="rect">
+            <a:avLst/>
+          </a:prstGeom>
+          <a:noFill/>
+          <a:ln/>
+        </p:spPr>
+        <p:txBody>
+          <a:bodyPr wrap="square" lIns="0" tIns="0" rIns="0" bIns="0" rtlCol="0" anchor="t"/>
+          <a:lstStyle/>
+          <a:p>
+            <a:pPr indent="0" marL="0">
+              <a:lnSpc>
+                <a:spcPct val="105000"/>
+              </a:lnSpc>
+              <a:buNone/>
+            </a:pPr>
+            <a:r>
+              <a:rPr lang="en-US" sz="1200" dirty="0">
+                <a:solidFill>
+                  <a:srgbClr val="1C2434"/>
+                </a:solidFill>
+                <a:latin typeface="Calibri" pitchFamily="34" charset="0"/>
+                <a:ea typeface="Calibri" pitchFamily="34" charset="-122"/>
+                <a:cs typeface="Calibri" pitchFamily="34" charset="-120"/>
+              </a:rPr>
+              <a:t>Draw the system boundary and define how the parts connect, so independently generated pieces still fit together.</a:t>
+            </a:r>
+            <a:endParaRPr lang="en-US" sz="1200" dirty="0"/>
+          </a:p>
+        </p:txBody>
+      </p:sp>
+      <p:sp>
+        <p:nvSpPr>
+          <p:cNvPr id="12" name="Shape 8"/>
+          <p:cNvSpPr/>
+          <p:nvPr/>
+        </p:nvSpPr>
+        <p:spPr>
+          <a:xfrm>
+            <a:off x="6277356" y="1828800"/>
+            <a:ext cx="5408676" cy="1920240"/>
+          </a:xfrm>
+          <a:prstGeom prst="roundRect">
+            <a:avLst>
+              <a:gd name="adj" fmla="val 4286"/>
+            </a:avLst>
+          </a:prstGeom>
+          <a:solidFill>
+            <a:srgbClr val="EFF3F9"/>
+          </a:solidFill>
+          <a:ln w="9525">
+            <a:solidFill>
+              <a:srgbClr val="D8DEE9"/>
+            </a:solidFill>
+            <a:prstDash val="solid"/>
+          </a:ln>
+          <a:effectLst>
+            <a:outerShdw sx="100000" sy="100000" kx="0" ky="0" algn="bl" rotWithShape="0" blurRad="88900" dist="25400" dir="5400000">
+              <a:srgbClr val="000000">
+                <a:alpha val="12000"/>
+              </a:srgbClr>
+            </a:outerShdw>
+          </a:effectLst>
+        </p:spPr>
+        <p:txBody>
+          <a:bodyPr/>
+          <a:p/>
+        </p:txBody>
+      </p:sp>
+      <p:sp>
+        <p:nvSpPr>
+          <p:cNvPr id="13" name="Shape 9"/>
+          <p:cNvSpPr/>
+          <p:nvPr/>
+        </p:nvSpPr>
+        <p:spPr>
+          <a:xfrm>
+            <a:off x="6533388" y="2103120"/>
+            <a:ext cx="621792" cy="621792"/>
+          </a:xfrm>
+          <a:prstGeom prst="ellipse">
+            <a:avLst/>
+          </a:prstGeom>
+          <a:solidFill>
+            <a:srgbClr val="17233D"/>
+          </a:solidFill>
+          <a:ln/>
+          <a:effectLst>
+            <a:outerShdw sx="100000" sy="100000" kx="0" ky="0" algn="bl" rotWithShape="0" blurRad="88900" dist="25400" dir="5400000">
+              <a:srgbClr val="000000">
+                <a:alpha val="12000"/>
+              </a:srgbClr>
+            </a:outerShdw>
+          </a:effectLst>
+        </p:spPr>
+        <p:txBody>
+          <a:bodyPr/>
+          <a:p/>
+        </p:txBody>
+      </p:sp>
+      <p:sp>
+        <p:nvSpPr>
+          <p:cNvPr id="15" name="Text 10"/>
+          <p:cNvSpPr/>
+          <p:nvPr/>
+        </p:nvSpPr>
+        <p:spPr>
+          <a:xfrm>
+            <a:off x="7328916" y="2103120"/>
+            <a:ext cx="4128516" cy="384048"/>
+          </a:xfrm>
+          <a:prstGeom prst="rect">
+            <a:avLst/>
+          </a:prstGeom>
+          <a:noFill/>
+          <a:ln/>
+        </p:spPr>
+        <p:txBody>
+          <a:bodyPr wrap="square" lIns="0" tIns="0" rIns="0" bIns="0" rtlCol="0" anchor="ctr"/>
+          <a:lstStyle/>
+          <a:p>
+            <a:pPr indent="0" marL="0">
+              <a:buNone/>
+            </a:pPr>
+            <a:r>
+              <a:rPr lang="en-US" sz="1450" b="1" dirty="0">
+                <a:solidFill>
+                  <a:srgbClr val="CC0035"/>
+                </a:solidFill>
+                <a:latin typeface="Cambria" pitchFamily="34" charset="0"/>
+                <a:ea typeface="Cambria" pitchFamily="34" charset="-122"/>
+                <a:cs typeface="Cambria" pitchFamily="34" charset="-120"/>
+              </a:rPr>
+              <a:t>Requirements &amp; traceability</a:t>
+            </a:r>
+            <a:endParaRPr lang="en-US" sz="1450" dirty="0"/>
+          </a:p>
+        </p:txBody>
+      </p:sp>
+      <p:sp>
+        <p:nvSpPr>
+          <p:cNvPr id="16" name="Text 11"/>
+          <p:cNvSpPr/>
+          <p:nvPr/>
+        </p:nvSpPr>
+        <p:spPr>
+          <a:xfrm>
+            <a:off x="7328916" y="2523744"/>
+            <a:ext cx="4082796" cy="1005840"/>
+          </a:xfrm>
+          <a:prstGeom prst="rect">
+            <a:avLst/>
+          </a:prstGeom>
+          <a:noFill/>
+          <a:ln/>
+        </p:spPr>
+        <p:txBody>
+          <a:bodyPr wrap="square" lIns="0" tIns="0" rIns="0" bIns="0" rtlCol="0" anchor="t"/>
+          <a:lstStyle/>
+          <a:p>
+            <a:pPr indent="0" marL="0">
+              <a:lnSpc>
+                <a:spcPct val="105000"/>
+              </a:lnSpc>
+              <a:buNone/>
+            </a:pPr>
+            <a:r>
+              <a:rPr lang="en-US" sz="1200" dirty="0">
+                <a:solidFill>
+                  <a:srgbClr val="1C2434"/>
+                </a:solidFill>
+                <a:latin typeface="Calibri" pitchFamily="34" charset="0"/>
+                <a:ea typeface="Calibri" pitchFamily="34" charset="-122"/>
+                <a:cs typeface="Calibri" pitchFamily="34" charset="-120"/>
+              </a:rPr>
+              <a:t>Turn intent into verifiable requirements and trace each one to the parts and tests that satisfy it.</a:t>
+            </a:r>
+            <a:endParaRPr lang="en-US" sz="1200" dirty="0"/>
+          </a:p>
+        </p:txBody>
+      </p:sp>
+      <p:sp>
+        <p:nvSpPr>
+          <p:cNvPr id="17" name="Shape 12"/>
+          <p:cNvSpPr/>
+          <p:nvPr/>
+        </p:nvSpPr>
+        <p:spPr>
+          <a:xfrm>
+            <a:off x="502920" y="4069080"/>
+            <a:ext cx="5408676" cy="1920240"/>
+          </a:xfrm>
+          <a:prstGeom prst="roundRect">
+            <a:avLst>
+              <a:gd name="adj" fmla="val 4286"/>
+            </a:avLst>
+          </a:prstGeom>
+          <a:solidFill>
+            <a:srgbClr val="F6F8FC"/>
+          </a:solidFill>
+          <a:ln w="9525">
+            <a:solidFill>
+              <a:srgbClr val="D8DEE9"/>
+            </a:solidFill>
+            <a:prstDash val="solid"/>
+          </a:ln>
+          <a:effectLst>
+            <a:outerShdw sx="100000" sy="100000" kx="0" ky="0" algn="bl" rotWithShape="0" blurRad="88900" dist="25400" dir="5400000">
+              <a:srgbClr val="000000">
+                <a:alpha val="12000"/>
+              </a:srgbClr>
+            </a:outerShdw>
+          </a:effectLst>
+        </p:spPr>
+        <p:txBody>
+          <a:bodyPr/>
+          <a:p/>
+        </p:txBody>
+      </p:sp>
+      <p:sp>
+        <p:nvSpPr>
+          <p:cNvPr id="18" name="Shape 13"/>
+          <p:cNvSpPr/>
+          <p:nvPr/>
+        </p:nvSpPr>
+        <p:spPr>
+          <a:xfrm>
+            <a:off x="758952" y="4343400"/>
+            <a:ext cx="621792" cy="621792"/>
+          </a:xfrm>
+          <a:prstGeom prst="ellipse">
+            <a:avLst/>
+          </a:prstGeom>
+          <a:solidFill>
+            <a:srgbClr val="17233D"/>
+          </a:solidFill>
+          <a:ln/>
+          <a:effectLst>
+            <a:outerShdw sx="100000" sy="100000" kx="0" ky="0" algn="bl" rotWithShape="0" blurRad="88900" dist="25400" dir="5400000">
+              <a:srgbClr val="000000">
+                <a:alpha val="12000"/>
+              </a:srgbClr>
+            </a:outerShdw>
+          </a:effectLst>
+        </p:spPr>
+        <p:txBody>
+          <a:bodyPr/>
+          <a:p/>
+        </p:txBody>
+      </p:sp>
+      <p:sp>
+        <p:nvSpPr>
+          <p:cNvPr id="20" name="Text 14"/>
+          <p:cNvSpPr/>
+          <p:nvPr/>
+        </p:nvSpPr>
+        <p:spPr>
+          <a:xfrm>
+            <a:off x="1554480" y="4343400"/>
+            <a:ext cx="4128516" cy="384048"/>
+          </a:xfrm>
+          <a:prstGeom prst="rect">
+            <a:avLst/>
+          </a:prstGeom>
+          <a:noFill/>
+          <a:ln/>
+        </p:spPr>
+        <p:txBody>
+          <a:bodyPr wrap="square" lIns="0" tIns="0" rIns="0" bIns="0" rtlCol="0" anchor="ctr"/>
+          <a:lstStyle/>
+          <a:p>
+            <a:pPr indent="0" marL="0">
+              <a:buNone/>
+            </a:pPr>
+            <a:r>
+              <a:rPr lang="en-US" sz="1450" b="1" dirty="0">
+                <a:solidFill>
+                  <a:srgbClr val="CC0035"/>
+                </a:solidFill>
+                <a:latin typeface="Cambria" pitchFamily="34" charset="0"/>
+                <a:ea typeface="Cambria" pitchFamily="34" charset="-122"/>
+                <a:cs typeface="Cambria" pitchFamily="34" charset="-120"/>
+              </a:rPr>
+              <a:t>Verification &amp; validation</a:t>
+            </a:r>
+            <a:endParaRPr lang="en-US" sz="1450" dirty="0"/>
+          </a:p>
+        </p:txBody>
+      </p:sp>
+      <p:sp>
+        <p:nvSpPr>
+          <p:cNvPr id="21" name="Text 15"/>
+          <p:cNvSpPr/>
+          <p:nvPr/>
+        </p:nvSpPr>
+        <p:spPr>
+          <a:xfrm>
+            <a:off x="1554480" y="4764024"/>
+            <a:ext cx="4082796" cy="1005840"/>
+          </a:xfrm>
+          <a:prstGeom prst="rect">
+            <a:avLst/>
+          </a:prstGeom>
+          <a:noFill/>
+          <a:ln/>
+        </p:spPr>
+        <p:txBody>
+          <a:bodyPr wrap="square" lIns="0" tIns="0" rIns="0" bIns="0" rtlCol="0" anchor="t"/>
+          <a:lstStyle/>
+          <a:p>
+            <a:pPr indent="0" marL="0">
+              <a:lnSpc>
+                <a:spcPct val="105000"/>
+              </a:lnSpc>
+              <a:buNone/>
+            </a:pPr>
+            <a:r>
+              <a:rPr lang="en-US" sz="1200" dirty="0">
+                <a:solidFill>
+                  <a:srgbClr val="1C2434"/>
+                </a:solidFill>
+                <a:latin typeface="Calibri" pitchFamily="34" charset="0"/>
+                <a:ea typeface="Calibri" pitchFamily="34" charset="-122"/>
+                <a:cs typeface="Calibri" pitchFamily="34" charset="-120"/>
+              </a:rPr>
+              <a:t>Show by evidence that the whole meets the need — not merely that any single generated part looks right.</a:t>
+            </a:r>
+            <a:endParaRPr lang="en-US" sz="1200" dirty="0"/>
+          </a:p>
+        </p:txBody>
+      </p:sp>
+      <p:sp>
+        <p:nvSpPr>
+          <p:cNvPr id="22" name="Shape 16"/>
+          <p:cNvSpPr/>
+          <p:nvPr/>
+        </p:nvSpPr>
+        <p:spPr>
+          <a:xfrm>
+            <a:off x="6277356" y="4069080"/>
+            <a:ext cx="5408676" cy="1920240"/>
+          </a:xfrm>
+          <a:prstGeom prst="roundRect">
+            <a:avLst>
+              <a:gd name="adj" fmla="val 4286"/>
+            </a:avLst>
+          </a:prstGeom>
+          <a:solidFill>
+            <a:srgbClr val="EFF3F9"/>
+          </a:solidFill>
+          <a:ln w="9525">
+            <a:solidFill>
+              <a:srgbClr val="D8DEE9"/>
+            </a:solidFill>
+            <a:prstDash val="solid"/>
+          </a:ln>
+          <a:effectLst>
+            <a:outerShdw sx="100000" sy="100000" kx="0" ky="0" algn="bl" rotWithShape="0" blurRad="88900" dist="25400" dir="5400000">
+              <a:srgbClr val="000000">
+                <a:alpha val="12000"/>
+              </a:srgbClr>
+            </a:outerShdw>
+          </a:effectLst>
+        </p:spPr>
+        <p:txBody>
+          <a:bodyPr/>
+          <a:p/>
+        </p:txBody>
+      </p:sp>
+      <p:sp>
+        <p:nvSpPr>
+          <p:cNvPr id="23" name="Shape 17"/>
+          <p:cNvSpPr/>
+          <p:nvPr/>
+        </p:nvSpPr>
+        <p:spPr>
+          <a:xfrm>
+            <a:off x="6533388" y="4343400"/>
+            <a:ext cx="621792" cy="621792"/>
+          </a:xfrm>
+          <a:prstGeom prst="ellipse">
+            <a:avLst/>
+          </a:prstGeom>
+          <a:solidFill>
+            <a:srgbClr val="17233D"/>
+          </a:solidFill>
+          <a:ln/>
+          <a:effectLst>
+            <a:outerShdw sx="100000" sy="100000" kx="0" ky="0" algn="bl" rotWithShape="0" blurRad="88900" dist="25400" dir="5400000">
+              <a:srgbClr val="000000">
+                <a:alpha val="12000"/>
+              </a:srgbClr>
+            </a:outerShdw>
+          </a:effectLst>
+        </p:spPr>
+        <p:txBody>
+          <a:bodyPr/>
+          <a:p/>
+        </p:txBody>
+      </p:sp>
+      <p:sp>
+        <p:nvSpPr>
+          <p:cNvPr id="25" name="Text 18"/>
+          <p:cNvSpPr/>
+          <p:nvPr/>
+        </p:nvSpPr>
+        <p:spPr>
+          <a:xfrm>
+            <a:off x="7328916" y="4343400"/>
+            <a:ext cx="4128516" cy="384048"/>
+          </a:xfrm>
+          <a:prstGeom prst="rect">
+            <a:avLst/>
+          </a:prstGeom>
+          <a:noFill/>
+          <a:ln/>
+        </p:spPr>
+        <p:txBody>
+          <a:bodyPr wrap="square" lIns="0" tIns="0" rIns="0" bIns="0" rtlCol="0" anchor="ctr"/>
+          <a:lstStyle/>
+          <a:p>
+            <a:pPr indent="0" marL="0">
+              <a:buNone/>
+            </a:pPr>
+            <a:r>
+              <a:rPr lang="en-US" sz="1450" b="1" dirty="0">
+                <a:solidFill>
+                  <a:srgbClr val="CC0035"/>
+                </a:solidFill>
+                <a:latin typeface="Cambria" pitchFamily="34" charset="0"/>
+                <a:ea typeface="Cambria" pitchFamily="34" charset="-122"/>
+                <a:cs typeface="Cambria" pitchFamily="34" charset="-120"/>
+              </a:rPr>
+              <a:t>Function allocation &amp; risk</a:t>
+            </a:r>
+            <a:endParaRPr lang="en-US" sz="1450" dirty="0"/>
+          </a:p>
+        </p:txBody>
+      </p:sp>
+      <p:sp>
+        <p:nvSpPr>
+          <p:cNvPr id="26" name="Text 19"/>
+          <p:cNvSpPr/>
+          <p:nvPr/>
+        </p:nvSpPr>
+        <p:spPr>
+          <a:xfrm>
+            <a:off x="7328916" y="4764024"/>
+            <a:ext cx="4082796" cy="1005840"/>
+          </a:xfrm>
+          <a:prstGeom prst="rect">
+            <a:avLst/>
+          </a:prstGeom>
+          <a:noFill/>
+          <a:ln/>
+        </p:spPr>
+        <p:txBody>
+          <a:bodyPr wrap="square" lIns="0" tIns="0" rIns="0" bIns="0" rtlCol="0" anchor="t"/>
+          <a:lstStyle/>
+          <a:p>
+            <a:pPr indent="0" marL="0">
+              <a:lnSpc>
+                <a:spcPct val="105000"/>
+              </a:lnSpc>
+              <a:buNone/>
+            </a:pPr>
+            <a:r>
+              <a:rPr lang="en-US" sz="1200" dirty="0">
+                <a:solidFill>
+                  <a:srgbClr val="1C2434"/>
+                </a:solidFill>
+                <a:latin typeface="Calibri" pitchFamily="34" charset="0"/>
+                <a:ea typeface="Calibri" pitchFamily="34" charset="-122"/>
+                <a:cs typeface="Calibri" pitchFamily="34" charset="-120"/>
+              </a:rPr>
+              <a:t>Decide who does what — human, classical code, or learned model — and manage the risk each choice creates.</a:t>
+            </a:r>
+            <a:endParaRPr lang="en-US" sz="1200" dirty="0"/>
+          </a:p>
+        </p:txBody>
+      </p:sp>
+      <p:sp>
+        <p:nvSpPr>
+          <p:cNvPr id="27" name="Text 20"/>
+          <p:cNvSpPr/>
+          <p:nvPr/>
+        </p:nvSpPr>
+        <p:spPr>
+          <a:xfrm>
+            <a:off x="502920" y="6473952"/>
+            <a:ext cx="8686800" cy="274320"/>
+          </a:xfrm>
+          <a:prstGeom prst="rect">
+            <a:avLst/>
+          </a:prstGeom>
+          <a:noFill/>
+          <a:ln/>
+        </p:spPr>
+        <p:txBody>
+          <a:bodyPr wrap="square" lIns="0" tIns="0" rIns="0" bIns="0" rtlCol="0" anchor="ctr"/>
+          <a:lstStyle/>
+          <a:p>
+            <a:pPr algn="l" indent="0" marL="0">
+              <a:buNone/>
+            </a:pPr>
+            <a:r>
+              <a:rPr lang="en-US" sz="900" b="1" dirty="0">
+                <a:solidFill>
+                  <a:srgbClr val="3E5C89"/>
+                </a:solidFill>
+                <a:latin typeface="Calibri" pitchFamily="34" charset="0"/>
+                <a:ea typeface="Calibri" pitchFamily="34" charset="-122"/>
+                <a:cs typeface="Calibri" pitchFamily="34" charset="-120"/>
+              </a:rPr>
+              <a:t>FPGA Professional Association</a:t>
+            </a:r>
+            <a:pPr algn="l" indent="0" marL="0">
+              <a:buNone/>
+            </a:pPr>
+            <a:r>
+              <a:rPr lang="en-US" sz="900" dirty="0">
+                <a:solidFill>
+                  <a:srgbClr val="6B7488"/>
+                </a:solidFill>
+                <a:latin typeface="Calibri" pitchFamily="34" charset="0"/>
+                <a:ea typeface="Calibri" pitchFamily="34" charset="-122"/>
+                <a:cs typeface="Calibri" pitchFamily="34" charset="-120"/>
+              </a:rPr>
+              <a:t>  ·  AI-Augmented Systems Engineering  ·  Week 1</a:t>
+            </a:r>
+            <a:endParaRPr lang="en-US" sz="900" dirty="0"/>
+          </a:p>
+        </p:txBody>
+      </p:sp>
+      <p:sp>
+        <p:nvSpPr>
+          <p:cNvPr id="28" name="Text 21"/>
+          <p:cNvSpPr/>
+          <p:nvPr/>
+        </p:nvSpPr>
+        <p:spPr>
+          <a:xfrm>
+            <a:off x="11155680" y="6473952"/>
+            <a:ext cx="548640" cy="274320"/>
+          </a:xfrm>
+          <a:prstGeom prst="rect">
+            <a:avLst/>
+          </a:prstGeom>
+          <a:noFill/>
+          <a:ln/>
+        </p:spPr>
+        <p:txBody>
+          <a:bodyPr wrap="square" lIns="0" tIns="0" rIns="0" bIns="0" rtlCol="0" anchor="ctr"/>
+          <a:lstStyle/>
+          <a:p>
+            <a:pPr algn="r" indent="0" marL="0">
+              <a:buNone/>
+            </a:pPr>
+            <a:r>
+              <a:rPr lang="en-US" sz="900" dirty="0">
+                <a:solidFill>
+                  <a:srgbClr val="6B7488"/>
+                </a:solidFill>
+                <a:latin typeface="Calibri" pitchFamily="34" charset="0"/>
+                <a:ea typeface="Calibri" pitchFamily="34" charset="-122"/>
+                <a:cs typeface="Calibri" pitchFamily="34" charset="-120"/>
+              </a:rPr>
               <a:t>10</a:t>
+            </a:r>
+            <a:endParaRPr lang="en-US" sz="900" dirty="0"/>
+          </a:p>
+        </p:txBody>
+      </p:sp>
+      <p:pic>
+        <p:nvPicPr>
+          <p:cNvPr id="29" name="Picture 28" descr="icon_boundary.png"/>
+          <p:cNvPicPr>
+            <a:picLocks noChangeAspect="1"/>
+          </p:cNvPicPr>
+          <p:nvPr/>
+        </p:nvPicPr>
+        <p:blipFill>
+          <a:blip r:embed="rId8"/>
+          <a:stretch>
+            <a:fillRect/>
+          </a:stretch>
+        </p:blipFill>
+        <p:spPr>
+          <a:xfrm>
+            <a:off x="914400" y="2258568"/>
+            <a:ext cx="310896" cy="310896"/>
+          </a:xfrm>
+          <a:prstGeom prst="rect">
+            <a:avLst/>
+          </a:prstGeom>
+        </p:spPr>
+      </p:pic>
+      <p:pic>
+        <p:nvPicPr>
+          <p:cNvPr id="30" name="Picture 29" descr="icon_reqs.png"/>
+          <p:cNvPicPr>
+            <a:picLocks noChangeAspect="1"/>
+          </p:cNvPicPr>
+          <p:nvPr/>
+        </p:nvPicPr>
+        <p:blipFill>
+          <a:blip r:embed="rId9"/>
+          <a:stretch>
+            <a:fillRect/>
+          </a:stretch>
+        </p:blipFill>
+        <p:spPr>
+          <a:xfrm>
+            <a:off x="6688836" y="2258568"/>
+            <a:ext cx="310896" cy="310896"/>
+          </a:xfrm>
+          <a:prstGeom prst="rect">
+            <a:avLst/>
+          </a:prstGeom>
+        </p:spPr>
+      </p:pic>
+      <p:pic>
+        <p:nvPicPr>
+          <p:cNvPr id="31" name="Picture 30" descr="icon_vnv.png"/>
+          <p:cNvPicPr>
+            <a:picLocks noChangeAspect="1"/>
+          </p:cNvPicPr>
+          <p:nvPr/>
+        </p:nvPicPr>
+        <p:blipFill>
+          <a:blip r:embed="rId10"/>
+          <a:stretch>
+            <a:fillRect/>
+          </a:stretch>
+        </p:blipFill>
+        <p:spPr>
+          <a:xfrm>
+            <a:off x="914400" y="4498848"/>
+            <a:ext cx="310896" cy="310896"/>
+          </a:xfrm>
+          <a:prstGeom prst="rect">
+            <a:avLst/>
+          </a:prstGeom>
+        </p:spPr>
+      </p:pic>
+      <p:pic>
+        <p:nvPicPr>
+          <p:cNvPr id="32" name="Picture 31" descr="icon_alloc.png"/>
+          <p:cNvPicPr>
+            <a:picLocks noChangeAspect="1"/>
+          </p:cNvPicPr>
+          <p:nvPr/>
+        </p:nvPicPr>
+        <p:blipFill>
+          <a:blip r:embed="rId11"/>
+          <a:stretch>
+            <a:fillRect/>
+          </a:stretch>
+        </p:blipFill>
+        <p:spPr>
+          <a:xfrm>
+            <a:off x="6688836" y="4498848"/>
+            <a:ext cx="310896" cy="310896"/>
+          </a:xfrm>
+          <a:prstGeom prst="rect">
+            <a:avLst/>
+          </a:prstGeom>
+        </p:spPr>
+      </p:pic>
+    </p:spTree>
+  </p:cSld>
+  <p:clrMapOvr>
+    <a:masterClrMapping/>
+  </p:clrMapOvr>
+</p:sld>
+</file>
+
+<file path=ppt/slides/slide15.xml><?xml version="1.0" encoding="utf-8"?>
+<p:sld xmlns:a="http://schemas.openxmlformats.org/drawingml/2006/main" xmlns:p="http://schemas.openxmlformats.org/presentationml/2006/main" xmlns:r="http://schemas.openxmlformats.org/officeDocument/2006/relationships">
+  <p:cSld>
+    <p:spTree>
+      <p:nvGrpSpPr>
+        <p:cNvPr id="1" name=""/>
+        <p:cNvGrpSpPr/>
+        <p:nvPr/>
+      </p:nvGrpSpPr>
+      <p:grpSpPr/>
+      <p:sp>
+        <p:nvSpPr>
+          <p:cNvPr id="2" name="Shape 0"/>
+          <p:cNvSpPr/>
+          <p:nvPr/>
+        </p:nvSpPr>
+        <p:spPr>
+          <a:xfrm>
+            <a:off x="502920" y="457200"/>
+            <a:ext cx="640080" cy="640080"/>
+          </a:xfrm>
+          <a:prstGeom prst="ellipse">
+            <a:avLst/>
+          </a:prstGeom>
+          <a:solidFill>
+            <a:srgbClr val="17233D"/>
+          </a:solidFill>
+          <a:ln/>
+          <a:effectLst>
+            <a:outerShdw sx="100000" sy="100000" kx="0" ky="0" algn="bl" rotWithShape="0" blurRad="88900" dist="25400" dir="5400000">
+              <a:srgbClr val="000000">
+                <a:alpha val="12000"/>
+              </a:srgbClr>
+            </a:outerShdw>
+          </a:effectLst>
+        </p:spPr>
+        <p:txBody>
+          <a:bodyPr/>
+          <a:p/>
+        </p:txBody>
+      </p:sp>
+      <p:pic>
+        <p:nvPicPr>
+          <p:cNvPr id="3" name="Image 0" descr="preencoded.png">    </p:cNvPr>
+          <p:cNvPicPr>
+            <a:picLocks noChangeAspect="1"/>
+          </p:cNvPicPr>
+          <p:nvPr/>
+        </p:nvPicPr>
+        <p:blipFill>
+          <a:blip r:embed="rId2"/>
+          <a:stretch>
+            <a:fillRect/>
+          </a:stretch>
+        </p:blipFill>
+        <p:spPr>
+          <a:xfrm>
+            <a:off x="656539" y="610819"/>
+            <a:ext cx="332842" cy="332842"/>
+          </a:xfrm>
+          <a:prstGeom prst="rect">
+            <a:avLst/>
+          </a:prstGeom>
+        </p:spPr>
+      </p:pic>
+      <p:sp>
+        <p:nvSpPr>
+          <p:cNvPr id="4" name="Text 1"/>
+          <p:cNvSpPr/>
+          <p:nvPr/>
+        </p:nvSpPr>
+        <p:spPr>
+          <a:xfrm>
+            <a:off x="1280160" y="420624"/>
+            <a:ext cx="10058400" cy="256032"/>
+          </a:xfrm>
+          <a:prstGeom prst="rect">
+            <a:avLst/>
+          </a:prstGeom>
+          <a:noFill/>
+          <a:ln/>
+        </p:spPr>
+        <p:txBody>
+          <a:bodyPr wrap="square" lIns="0" tIns="0" rIns="0" bIns="0" rtlCol="0" anchor="ctr"/>
+          <a:lstStyle/>
+          <a:p>
+            <a:pPr indent="0" marL="0">
+              <a:buNone/>
+            </a:pPr>
+            <a:r>
+              <a:rPr lang="en-US" sz="1100" b="1" spc="200" kern="0" dirty="0">
+                <a:solidFill>
+                  <a:srgbClr val="CC0035"/>
+                </a:solidFill>
+                <a:latin typeface="Calibri" pitchFamily="34" charset="0"/>
+                <a:ea typeface="Calibri" pitchFamily="34" charset="-122"/>
+                <a:cs typeface="Calibri" pitchFamily="34" charset="-120"/>
+              </a:rPr>
+              <a:t>WEEK 1 · THE CATCH</a:t>
+            </a:r>
+            <a:endParaRPr lang="en-US" sz="1100" dirty="0"/>
+          </a:p>
+        </p:txBody>
+      </p:sp>
+      <p:sp>
+        <p:nvSpPr>
+          <p:cNvPr id="5" name="Text 2"/>
+          <p:cNvSpPr/>
+          <p:nvPr/>
+        </p:nvSpPr>
+        <p:spPr>
+          <a:xfrm>
+            <a:off x="1280160" y="658368"/>
+            <a:ext cx="10332720" cy="566928"/>
+          </a:xfrm>
+          <a:prstGeom prst="rect">
+            <a:avLst/>
+          </a:prstGeom>
+          <a:noFill/>
+          <a:ln/>
+        </p:spPr>
+        <p:txBody>
+          <a:bodyPr wrap="square" lIns="0" tIns="0" rIns="0" bIns="0" rtlCol="0" anchor="ctr"/>
+          <a:lstStyle/>
+          <a:p>
+            <a:pPr indent="0" marL="0">
+              <a:buNone/>
+            </a:pPr>
+            <a:r>
+              <a:rPr lang="en-US" sz="2400" b="1" dirty="0">
+                <a:solidFill>
+                  <a:srgbClr val="17233D"/>
+                </a:solidFill>
+                <a:latin typeface="Cambria" pitchFamily="34" charset="0"/>
+                <a:ea typeface="Cambria" pitchFamily="34" charset="-122"/>
+                <a:cs typeface="Cambria" pitchFamily="34" charset="-120"/>
+              </a:rPr>
+              <a:t>Higher Altitude, Same Accountability</a:t>
+            </a:r>
+            <a:endParaRPr lang="en-US" sz="2400" dirty="0"/>
+          </a:p>
+        </p:txBody>
+      </p:sp>
+      <p:sp>
+        <p:nvSpPr>
+          <p:cNvPr id="6" name="Shape 3"/>
+          <p:cNvSpPr/>
+          <p:nvPr/>
+        </p:nvSpPr>
+        <p:spPr>
+          <a:xfrm>
+            <a:off x="502920" y="1389888"/>
+            <a:ext cx="11183112" cy="0"/>
+          </a:xfrm>
+          <a:prstGeom prst="line">
+            <a:avLst/>
+          </a:prstGeom>
+          <a:noFill/>
+          <a:ln w="12700">
+            <a:solidFill>
+              <a:srgbClr val="D8DEE9"/>
+            </a:solidFill>
+            <a:prstDash val="solid"/>
+          </a:ln>
+        </p:spPr>
+        <p:txBody>
+          <a:bodyPr/>
+          <a:p/>
+        </p:txBody>
+      </p:sp>
+      <p:sp>
+        <p:nvSpPr>
+          <p:cNvPr id="7" name="Shape 4"/>
+          <p:cNvSpPr/>
+          <p:nvPr/>
+        </p:nvSpPr>
+        <p:spPr>
+          <a:xfrm>
+            <a:off x="502920" y="1783080"/>
+            <a:ext cx="4892040" cy="4069080"/>
+          </a:xfrm>
+          <a:prstGeom prst="roundRect">
+            <a:avLst>
+              <a:gd name="adj" fmla="val 2247"/>
+            </a:avLst>
+          </a:prstGeom>
+          <a:solidFill>
+            <a:srgbClr val="17233D"/>
+          </a:solidFill>
+          <a:ln/>
+          <a:effectLst>
+            <a:outerShdw sx="100000" sy="100000" kx="0" ky="0" algn="bl" rotWithShape="0" blurRad="114300" dist="38100" dir="5400000">
+              <a:srgbClr val="1A2A4F">
+                <a:alpha val="16000"/>
+              </a:srgbClr>
+            </a:outerShdw>
+          </a:effectLst>
+        </p:spPr>
+        <p:txBody>
+          <a:bodyPr/>
+          <a:p/>
+        </p:txBody>
+      </p:sp>
+      <p:sp>
+        <p:nvSpPr>
+          <p:cNvPr id="8" name="Shape 5"/>
+          <p:cNvSpPr/>
+          <p:nvPr/>
+        </p:nvSpPr>
+        <p:spPr>
+          <a:xfrm>
+            <a:off x="822960" y="2103120"/>
+            <a:ext cx="502920" cy="502920"/>
+          </a:xfrm>
+          <a:prstGeom prst="ellipse">
+            <a:avLst/>
+          </a:prstGeom>
+          <a:solidFill>
+            <a:srgbClr val="CC0035"/>
+          </a:solidFill>
+          <a:ln/>
+          <a:effectLst>
+            <a:outerShdw sx="100000" sy="100000" kx="0" ky="0" algn="bl" rotWithShape="0" blurRad="88900" dist="25400" dir="5400000">
+              <a:srgbClr val="000000">
+                <a:alpha val="12000"/>
+              </a:srgbClr>
+            </a:outerShdw>
+          </a:effectLst>
+        </p:spPr>
+        <p:txBody>
+          <a:bodyPr/>
+          <a:p/>
+        </p:txBody>
+      </p:sp>
+      <p:pic>
+        <p:nvPicPr>
+          <p:cNvPr id="9" name="Image 1" descr="preencoded.png">    </p:cNvPr>
+          <p:cNvPicPr>
+            <a:picLocks noChangeAspect="1"/>
+          </p:cNvPicPr>
+          <p:nvPr/>
+        </p:nvPicPr>
+        <p:blipFill>
+          <a:blip r:embed="rId3"/>
+          <a:stretch>
+            <a:fillRect/>
+          </a:stretch>
+        </p:blipFill>
+        <p:spPr>
+          <a:xfrm>
+            <a:off x="948690" y="2228850"/>
+            <a:ext cx="251460" cy="251460"/>
+          </a:xfrm>
+          <a:prstGeom prst="rect">
+            <a:avLst/>
+          </a:prstGeom>
+        </p:spPr>
+      </p:pic>
+      <p:sp>
+        <p:nvSpPr>
+          <p:cNvPr id="10" name="Text 6"/>
+          <p:cNvSpPr/>
+          <p:nvPr/>
+        </p:nvSpPr>
+        <p:spPr>
+          <a:xfrm>
+            <a:off x="868680" y="2834640"/>
+            <a:ext cx="4160520" cy="2697480"/>
+          </a:xfrm>
+          <a:prstGeom prst="rect">
+            <a:avLst/>
+          </a:prstGeom>
+          <a:noFill/>
+          <a:ln/>
+        </p:spPr>
+        <p:txBody>
+          <a:bodyPr wrap="square" lIns="0" tIns="0" rIns="0" bIns="0" rtlCol="0" anchor="t"/>
+          <a:lstStyle/>
+          <a:p>
+            <a:pPr indent="0" marL="0">
+              <a:lnSpc>
+                <a:spcPct val="112000"/>
+              </a:lnSpc>
+              <a:buNone/>
+            </a:pPr>
+            <a:r>
+              <a:rPr lang="en-US" sz="1650" i="1" dirty="0">
+                <a:solidFill>
+                  <a:srgbClr val="FFFFFF"/>
+                </a:solidFill>
+                <a:latin typeface="Cambria" pitchFamily="34" charset="0"/>
+                <a:ea typeface="Cambria" pitchFamily="34" charset="-122"/>
+                <a:cs typeface="Cambria" pitchFamily="34" charset="-120"/>
+              </a:rPr>
+              <a:t>Your altitude rises. You spend less time producing parts and more on intent, interfaces, integration, and proof — the whole-system view that used to belong to a few.</a:t>
+            </a:r>
+            <a:endParaRPr lang="en-US" sz="1650" dirty="0"/>
+          </a:p>
+        </p:txBody>
+      </p:sp>
+      <p:sp>
+        <p:nvSpPr>
+          <p:cNvPr id="11" name="Shape 7"/>
+          <p:cNvSpPr/>
+          <p:nvPr/>
+        </p:nvSpPr>
+        <p:spPr>
+          <a:xfrm>
+            <a:off x="5669280" y="1783080"/>
+            <a:ext cx="6016752" cy="1920240"/>
+          </a:xfrm>
+          <a:prstGeom prst="roundRect">
+            <a:avLst>
+              <a:gd name="adj" fmla="val 4286"/>
+            </a:avLst>
+          </a:prstGeom>
+          <a:solidFill>
+            <a:srgbClr val="EFF3F9"/>
+          </a:solidFill>
+          <a:ln w="9525">
+            <a:solidFill>
+              <a:srgbClr val="D8DEE9"/>
+            </a:solidFill>
+            <a:prstDash val="solid"/>
+          </a:ln>
+          <a:effectLst>
+            <a:outerShdw sx="100000" sy="100000" kx="0" ky="0" algn="bl" rotWithShape="0" blurRad="88900" dist="25400" dir="5400000">
+              <a:srgbClr val="000000">
+                <a:alpha val="12000"/>
+              </a:srgbClr>
+            </a:outerShdw>
+          </a:effectLst>
+        </p:spPr>
+        <p:txBody>
+          <a:bodyPr/>
+          <a:p/>
+        </p:txBody>
+      </p:sp>
+      <p:sp>
+        <p:nvSpPr>
+          <p:cNvPr id="12" name="Shape 8"/>
+          <p:cNvSpPr/>
+          <p:nvPr/>
+        </p:nvSpPr>
+        <p:spPr>
+          <a:xfrm>
+            <a:off x="5907024" y="2002536"/>
+            <a:ext cx="457200" cy="457200"/>
+          </a:xfrm>
+          <a:prstGeom prst="ellipse">
+            <a:avLst/>
+          </a:prstGeom>
+          <a:solidFill>
+            <a:srgbClr val="3E5C89"/>
+          </a:solidFill>
+          <a:ln/>
+        </p:spPr>
+        <p:txBody>
+          <a:bodyPr/>
+          <a:p/>
+        </p:txBody>
+      </p:sp>
+      <p:sp>
+        <p:nvSpPr>
+          <p:cNvPr id="13" name="Text 9"/>
+          <p:cNvSpPr/>
+          <p:nvPr/>
+        </p:nvSpPr>
+        <p:spPr>
+          <a:xfrm>
+            <a:off x="5907024" y="2002536"/>
+            <a:ext cx="457200" cy="457200"/>
+          </a:xfrm>
+          <a:prstGeom prst="rect">
+            <a:avLst/>
+          </a:prstGeom>
+          <a:noFill/>
+          <a:ln/>
+        </p:spPr>
+        <p:txBody>
+          <a:bodyPr wrap="square" lIns="0" tIns="0" rIns="0" bIns="0" rtlCol="0" anchor="ctr"/>
+          <a:lstStyle/>
+          <a:p>
+            <a:pPr algn="ctr" indent="0" marL="0">
+              <a:buNone/>
+            </a:pPr>
+            <a:r>
+              <a:rPr lang="en-US" sz="1200" b="1" dirty="0">
+                <a:solidFill>
+                  <a:srgbClr val="FFFFFF"/>
+                </a:solidFill>
+                <a:latin typeface="Cambria" pitchFamily="34" charset="0"/>
+                <a:ea typeface="Cambria" pitchFamily="34" charset="-122"/>
+                <a:cs typeface="Cambria" pitchFamily="34" charset="-120"/>
+              </a:rPr>
+              <a:t>01</a:t>
+            </a:r>
+            <a:endParaRPr lang="en-US" sz="1200" dirty="0"/>
+          </a:p>
+        </p:txBody>
+      </p:sp>
+      <p:sp>
+        <p:nvSpPr>
+          <p:cNvPr id="14" name="Text 10"/>
+          <p:cNvSpPr/>
+          <p:nvPr/>
+        </p:nvSpPr>
+        <p:spPr>
+          <a:xfrm>
+            <a:off x="6537960" y="1984248"/>
+            <a:ext cx="4873752" cy="1517904"/>
+          </a:xfrm>
+          <a:prstGeom prst="rect">
+            <a:avLst/>
+          </a:prstGeom>
+          <a:noFill/>
+          <a:ln/>
+        </p:spPr>
+        <p:txBody>
+          <a:bodyPr wrap="square" lIns="0" tIns="0" rIns="0" bIns="0" rtlCol="0" anchor="ctr"/>
+          <a:lstStyle/>
+          <a:p>
+            <a:pPr indent="0" marL="0">
+              <a:lnSpc>
+                <a:spcPct val="106000"/>
+              </a:lnSpc>
+              <a:buNone/>
+            </a:pPr>
+            <a:r>
+              <a:rPr lang="en-US" sz="1300" dirty="0">
+                <a:solidFill>
+                  <a:srgbClr val="1C2434"/>
+                </a:solidFill>
+                <a:latin typeface="Calibri" pitchFamily="34" charset="0"/>
+                <a:ea typeface="Calibri" pitchFamily="34" charset="-122"/>
+                <a:cs typeface="Calibri" pitchFamily="34" charset="-120"/>
+              </a:rPr>
+              <a:t>Same accountability. AI can draft the artifact, but it cannot hold the requirement, sign the review, or carry the consequence. That stays human.</a:t>
+            </a:r>
+            <a:endParaRPr lang="en-US" sz="1300" dirty="0"/>
+          </a:p>
+        </p:txBody>
+      </p:sp>
+      <p:sp>
+        <p:nvSpPr>
+          <p:cNvPr id="15" name="Shape 11"/>
+          <p:cNvSpPr/>
+          <p:nvPr/>
+        </p:nvSpPr>
+        <p:spPr>
+          <a:xfrm>
+            <a:off x="5669280" y="3931920"/>
+            <a:ext cx="6016752" cy="1920240"/>
+          </a:xfrm>
+          <a:prstGeom prst="roundRect">
+            <a:avLst>
+              <a:gd name="adj" fmla="val 4286"/>
+            </a:avLst>
+          </a:prstGeom>
+          <a:solidFill>
+            <a:srgbClr val="F6F8FC"/>
+          </a:solidFill>
+          <a:ln w="9525">
+            <a:solidFill>
+              <a:srgbClr val="D8DEE9"/>
+            </a:solidFill>
+            <a:prstDash val="solid"/>
+          </a:ln>
+          <a:effectLst>
+            <a:outerShdw sx="100000" sy="100000" kx="0" ky="0" algn="bl" rotWithShape="0" blurRad="88900" dist="25400" dir="5400000">
+              <a:srgbClr val="000000">
+                <a:alpha val="12000"/>
+              </a:srgbClr>
+            </a:outerShdw>
+          </a:effectLst>
+        </p:spPr>
+        <p:txBody>
+          <a:bodyPr/>
+          <a:p/>
+        </p:txBody>
+      </p:sp>
+      <p:sp>
+        <p:nvSpPr>
+          <p:cNvPr id="16" name="Shape 12"/>
+          <p:cNvSpPr/>
+          <p:nvPr/>
+        </p:nvSpPr>
+        <p:spPr>
+          <a:xfrm>
+            <a:off x="5907024" y="4151376"/>
+            <a:ext cx="457200" cy="457200"/>
+          </a:xfrm>
+          <a:prstGeom prst="ellipse">
+            <a:avLst/>
+          </a:prstGeom>
+          <a:solidFill>
+            <a:srgbClr val="3E5C89"/>
+          </a:solidFill>
+          <a:ln/>
+        </p:spPr>
+        <p:txBody>
+          <a:bodyPr/>
+          <a:p/>
+        </p:txBody>
+      </p:sp>
+      <p:sp>
+        <p:nvSpPr>
+          <p:cNvPr id="17" name="Text 13"/>
+          <p:cNvSpPr/>
+          <p:nvPr/>
+        </p:nvSpPr>
+        <p:spPr>
+          <a:xfrm>
+            <a:off x="5907024" y="4151376"/>
+            <a:ext cx="457200" cy="457200"/>
+          </a:xfrm>
+          <a:prstGeom prst="rect">
+            <a:avLst/>
+          </a:prstGeom>
+          <a:noFill/>
+          <a:ln/>
+        </p:spPr>
+        <p:txBody>
+          <a:bodyPr wrap="square" lIns="0" tIns="0" rIns="0" bIns="0" rtlCol="0" anchor="ctr"/>
+          <a:lstStyle/>
+          <a:p>
+            <a:pPr algn="ctr" indent="0" marL="0">
+              <a:buNone/>
+            </a:pPr>
+            <a:r>
+              <a:rPr lang="en-US" sz="1200" b="1" dirty="0">
+                <a:solidFill>
+                  <a:srgbClr val="FFFFFF"/>
+                </a:solidFill>
+                <a:latin typeface="Cambria" pitchFamily="34" charset="0"/>
+                <a:ea typeface="Cambria" pitchFamily="34" charset="-122"/>
+                <a:cs typeface="Cambria" pitchFamily="34" charset="-120"/>
+              </a:rPr>
+              <a:t>02</a:t>
+            </a:r>
+            <a:endParaRPr lang="en-US" sz="1200" dirty="0"/>
+          </a:p>
+        </p:txBody>
+      </p:sp>
+      <p:sp>
+        <p:nvSpPr>
+          <p:cNvPr id="18" name="Text 14"/>
+          <p:cNvSpPr/>
+          <p:nvPr/>
+        </p:nvSpPr>
+        <p:spPr>
+          <a:xfrm>
+            <a:off x="6537960" y="4133088"/>
+            <a:ext cx="4873752" cy="1517904"/>
+          </a:xfrm>
+          <a:prstGeom prst="rect">
+            <a:avLst/>
+          </a:prstGeom>
+          <a:noFill/>
+          <a:ln/>
+        </p:spPr>
+        <p:txBody>
+          <a:bodyPr wrap="square" lIns="0" tIns="0" rIns="0" bIns="0" rtlCol="0" anchor="ctr"/>
+          <a:lstStyle/>
+          <a:p>
+            <a:pPr indent="0" marL="0">
+              <a:lnSpc>
+                <a:spcPct val="106000"/>
+              </a:lnSpc>
+              <a:buNone/>
+            </a:pPr>
+            <a:r>
+              <a:rPr lang="en-US" sz="1300" dirty="0">
+                <a:solidFill>
+                  <a:srgbClr val="1C2434"/>
+                </a:solidFill>
+                <a:latin typeface="Calibri" pitchFamily="34" charset="0"/>
+                <a:ea typeface="Calibri" pitchFamily="34" charset="-122"/>
+                <a:cs typeface="Calibri" pitchFamily="34" charset="-120"/>
+              </a:rPr>
+              <a:t>The catch: if AI does the junior work, teams must deliberately build the judgment that senior systems engineers still need — a pipeline risk we return to in the human-systems module.</a:t>
+            </a:r>
+            <a:endParaRPr lang="en-US" sz="1300" dirty="0"/>
+          </a:p>
+        </p:txBody>
+      </p:sp>
+      <p:sp>
+        <p:nvSpPr>
+          <p:cNvPr id="19" name="Text 15"/>
+          <p:cNvSpPr/>
+          <p:nvPr/>
+        </p:nvSpPr>
+        <p:spPr>
+          <a:xfrm>
+            <a:off x="502920" y="6473952"/>
+            <a:ext cx="8686800" cy="274320"/>
+          </a:xfrm>
+          <a:prstGeom prst="rect">
+            <a:avLst/>
+          </a:prstGeom>
+          <a:noFill/>
+          <a:ln/>
+        </p:spPr>
+        <p:txBody>
+          <a:bodyPr wrap="square" lIns="0" tIns="0" rIns="0" bIns="0" rtlCol="0" anchor="ctr"/>
+          <a:lstStyle/>
+          <a:p>
+            <a:pPr algn="l" indent="0" marL="0">
+              <a:buNone/>
+            </a:pPr>
+            <a:r>
+              <a:rPr lang="en-US" sz="900" b="1" dirty="0">
+                <a:solidFill>
+                  <a:srgbClr val="3E5C89"/>
+                </a:solidFill>
+                <a:latin typeface="Calibri" pitchFamily="34" charset="0"/>
+                <a:ea typeface="Calibri" pitchFamily="34" charset="-122"/>
+                <a:cs typeface="Calibri" pitchFamily="34" charset="-120"/>
+              </a:rPr>
+              <a:t>FPGA Professional Association</a:t>
+            </a:r>
+            <a:pPr algn="l" indent="0" marL="0">
+              <a:buNone/>
+            </a:pPr>
+            <a:r>
+              <a:rPr lang="en-US" sz="900" dirty="0">
+                <a:solidFill>
+                  <a:srgbClr val="6B7488"/>
+                </a:solidFill>
+                <a:latin typeface="Calibri" pitchFamily="34" charset="0"/>
+                <a:ea typeface="Calibri" pitchFamily="34" charset="-122"/>
+                <a:cs typeface="Calibri" pitchFamily="34" charset="-120"/>
+              </a:rPr>
+              <a:t>  ·  AI-Augmented Systems Engineering  ·  Week 1</a:t>
+            </a:r>
+            <a:endParaRPr lang="en-US" sz="900" dirty="0"/>
+          </a:p>
+        </p:txBody>
+      </p:sp>
+      <p:sp>
+        <p:nvSpPr>
+          <p:cNvPr id="20" name="Text 16"/>
+          <p:cNvSpPr/>
+          <p:nvPr/>
+        </p:nvSpPr>
+        <p:spPr>
+          <a:xfrm>
+            <a:off x="11155680" y="6473952"/>
+            <a:ext cx="548640" cy="274320"/>
+          </a:xfrm>
+          <a:prstGeom prst="rect">
+            <a:avLst/>
+          </a:prstGeom>
+          <a:noFill/>
+          <a:ln/>
+        </p:spPr>
+        <p:txBody>
+          <a:bodyPr wrap="square" lIns="0" tIns="0" rIns="0" bIns="0" rtlCol="0" anchor="ctr"/>
+          <a:lstStyle/>
+          <a:p>
+            <a:pPr algn="r" indent="0" marL="0">
+              <a:buNone/>
+            </a:pPr>
+            <a:r>
+              <a:rPr lang="en-US" sz="900" dirty="0">
+                <a:solidFill>
+                  <a:srgbClr val="6B7488"/>
+                </a:solidFill>
+                <a:latin typeface="Calibri" pitchFamily="34" charset="0"/>
+                <a:ea typeface="Calibri" pitchFamily="34" charset="-122"/>
+                <a:cs typeface="Calibri" pitchFamily="34" charset="-120"/>
+              </a:rPr>
+              <a:t>11</a:t>
             </a:r>
             <a:endParaRPr lang="en-US" sz="900" dirty="0"/>
           </a:p>
@@ -2876,6 +5657,10 @@
             </a:outerShdw>
           </a:effectLst>
         </p:spPr>
+        <p:txBody>
+          <a:bodyPr/>
+          <a:p/>
+        </p:txBody>
       </p:sp>
       <p:pic>
         <p:nvPicPr>
@@ -3001,6 +5786,10 @@
             <a:prstDash val="solid"/>
           </a:ln>
         </p:spPr>
+        <p:txBody>
+          <a:bodyPr/>
+          <a:p/>
+        </p:txBody>
       </p:sp>
       <p:sp>
         <p:nvSpPr>
@@ -3035,6 +5824,10 @@
             </a:outerShdw>
           </a:effectLst>
         </p:spPr>
+        <p:txBody>
+          <a:bodyPr/>
+          <a:p/>
+        </p:txBody>
       </p:sp>
       <p:sp>
         <p:nvSpPr>
@@ -3094,6 +5887,10 @@
           </a:solidFill>
           <a:ln/>
         </p:spPr>
+        <p:txBody>
+          <a:bodyPr/>
+          <a:p/>
+        </p:txBody>
       </p:sp>
       <p:sp>
         <p:nvSpPr>
@@ -3192,6 +5989,10 @@
           </a:solidFill>
           <a:ln/>
         </p:spPr>
+        <p:txBody>
+          <a:bodyPr/>
+          <a:p/>
+        </p:txBody>
       </p:sp>
       <p:sp>
         <p:nvSpPr>
@@ -3290,6 +6091,10 @@
           </a:solidFill>
           <a:ln/>
         </p:spPr>
+        <p:txBody>
+          <a:bodyPr/>
+          <a:p/>
+        </p:txBody>
       </p:sp>
       <p:sp>
         <p:nvSpPr>
@@ -3388,6 +6193,10 @@
           </a:solidFill>
           <a:ln/>
         </p:spPr>
+        <p:txBody>
+          <a:bodyPr/>
+          <a:p/>
+        </p:txBody>
       </p:sp>
       <p:sp>
         <p:nvSpPr>
@@ -3486,6 +6295,10 @@
           </a:solidFill>
           <a:ln/>
         </p:spPr>
+        <p:txBody>
+          <a:bodyPr/>
+          <a:p/>
+        </p:txBody>
       </p:sp>
       <p:sp>
         <p:nvSpPr>
@@ -3559,7 +6372,7 @@
                 <a:ea typeface="Calibri" pitchFamily="34" charset="-122"/>
                 <a:cs typeface="Calibri" pitchFamily="34" charset="-120"/>
               </a:rPr>
-              <a:t>Studio activity &amp; discussion</a:t>
+              <a:t>From implementor to systems engineer</a:t>
             </a:r>
             <a:endParaRPr lang="en-US" sz="1250" dirty="0"/>
           </a:p>
@@ -3584,6 +6397,10 @@
           </a:solidFill>
           <a:ln/>
         </p:spPr>
+        <p:txBody>
+          <a:bodyPr/>
+          <a:p/>
+        </p:txBody>
       </p:sp>
       <p:sp>
         <p:nvSpPr>
@@ -3657,7 +6474,7 @@
                 <a:ea typeface="Calibri" pitchFamily="34" charset="-122"/>
                 <a:cs typeface="Calibri" pitchFamily="34" charset="-120"/>
               </a:rPr>
-              <a:t>Deliverables &amp; next week</a:t>
+              <a:t>Studio, deliverables &amp; wrap</a:t>
             </a:r>
             <a:endParaRPr lang="en-US" sz="1250" dirty="0"/>
           </a:p>
@@ -3696,6 +6513,10 @@
             </a:outerShdw>
           </a:effectLst>
         </p:spPr>
+        <p:txBody>
+          <a:bodyPr/>
+          <a:p/>
+        </p:txBody>
       </p:sp>
       <p:sp>
         <p:nvSpPr>
@@ -3849,6 +6670,30 @@
                 <a:cs typeface="Calibri" pitchFamily="34" charset="-120"/>
               </a:rPr>
               <a:t>Relate the problem to INCOSE / SEBoK framings of complexity and emergence.</a:t>
+            </a:r>
+            <a:endParaRPr lang="en-US" sz="1250" dirty="0"/>
+          </a:p>
+          <a:p>
+            <a:pPr marL="177800" indent="-177800">
+              <a:lnSpc>
+                <a:spcPct val="103000"/>
+              </a:lnSpc>
+              <a:spcAft>
+                <a:spcPts val="1000"/>
+              </a:spcAft>
+              <a:buSzPct val="100000"/>
+              <a:buChar char="•"/>
+            </a:pPr>
+            <a:r>
+              <a:rPr lang="en-US" sz="1250" dirty="0">
+                <a:solidFill>
+                  <a:srgbClr val="1C2434"/>
+                </a:solidFill>
+                <a:latin typeface="Calibri" pitchFamily="34" charset="0"/>
+                <a:ea typeface="Calibri" pitchFamily="34" charset="-122"/>
+                <a:cs typeface="Calibri" pitchFamily="34" charset="-120"/>
+              </a:rPr>
+              <a:t>Explain how AI raises the engineer's altitude — from implementor toward systems engineer — and why managing complexity becomes the core skill.</a:t>
             </a:r>
             <a:endParaRPr lang="en-US" sz="1250" dirty="0"/>
           </a:p>
@@ -7451,7 +10296,7 @@
                 <a:ea typeface="Calibri" pitchFamily="34" charset="-122"/>
                 <a:cs typeface="Calibri" pitchFamily="34" charset="-120"/>
               </a:rPr>
-              <a:t>7</a:t>
+              <a:t>12</a:t>
             </a:r>
             <a:endParaRPr lang="en-US" sz="900" dirty="0"/>
           </a:p>
@@ -8391,7 +11236,7 @@
                 <a:ea typeface="Calibri" pitchFamily="34" charset="-122"/>
                 <a:cs typeface="Calibri" pitchFamily="34" charset="-120"/>
               </a:rPr>
-              <a:t>8</a:t>
+              <a:t>13</a:t>
             </a:r>
             <a:endParaRPr lang="en-US" sz="900" dirty="0"/>
           </a:p>
@@ -9159,7 +12004,7 @@
                 <a:ea typeface="Calibri" pitchFamily="34" charset="-122"/>
                 <a:cs typeface="Calibri" pitchFamily="34" charset="-120"/>
               </a:rPr>
-              <a:t>9</a:t>
+              <a:t>14</a:t>
             </a:r>
             <a:endParaRPr lang="en-US" sz="900" dirty="0"/>
           </a:p>

--- a/assets/courses/ai-augmented-se/FPGAPA_AIAugmentedSE_Week01_The_AI_Augmented_Problem.pptx
+++ b/assets/courses/ai-augmented-se/FPGAPA_AIAugmentedSE_Week01_The_AI_Augmented_Problem.pptx
@@ -3114,7 +3114,7 @@
           <p:nvPr/>
         </p:nvPicPr>
         <p:blipFill>
-          <a:blip r:embed="rId4"/>
+          <a:blip r:embed="rId3"/>
           <a:stretch>
             <a:fillRect/>
           </a:stretch>
@@ -3604,7 +3604,7 @@
           <p:nvPr/>
         </p:nvPicPr>
         <p:blipFill>
-          <a:blip r:embed="rId4"/>
+          <a:blip r:embed="rId3"/>
           <a:stretch>
             <a:fillRect/>
           </a:stretch>
@@ -3932,7 +3932,7 @@
           <p:nvPr/>
         </p:nvPicPr>
         <p:blipFill>
-          <a:blip r:embed="rId4"/>
+          <a:blip r:embed="rId3"/>
           <a:stretch>
             <a:fillRect/>
           </a:stretch>
@@ -4826,7 +4826,7 @@
           <p:nvPr/>
         </p:nvPicPr>
         <p:blipFill>
-          <a:blip r:embed="rId8"/>
+          <a:blip r:embed="rId7"/>
           <a:stretch>
             <a:fillRect/>
           </a:stretch>
@@ -4850,7 +4850,7 @@
           <p:nvPr/>
         </p:nvPicPr>
         <p:blipFill>
-          <a:blip r:embed="rId9"/>
+          <a:blip r:embed="rId8"/>
           <a:stretch>
             <a:fillRect/>
           </a:stretch>
@@ -4874,7 +4874,7 @@
           <p:nvPr/>
         </p:nvPicPr>
         <p:blipFill>
-          <a:blip r:embed="rId10"/>
+          <a:blip r:embed="rId9"/>
           <a:stretch>
             <a:fillRect/>
           </a:stretch>
@@ -4898,7 +4898,7 @@
           <p:nvPr/>
         </p:nvPicPr>
         <p:blipFill>
-          <a:blip r:embed="rId11"/>
+          <a:blip r:embed="rId10"/>
           <a:stretch>
             <a:fillRect/>
           </a:stretch>

--- a/assets/courses/ai-augmented-se/FPGAPA_AIAugmentedSE_Week01_The_AI_Augmented_Problem.pptx
+++ b/assets/courses/ai-augmented-se/FPGAPA_AIAugmentedSE_Week01_The_AI_Augmented_Problem.pptx
@@ -1762,7 +1762,7 @@
       </p:sp>
       <p:pic>
         <p:nvPicPr>
-          <p:cNvPr id="5" name="Image 0" descr="preencoded.png">    </p:cNvPr>
+          <p:cNvPr id="5" name="Image 0" descr="preencoded.png"/>
           <p:cNvPicPr>
             <a:picLocks noChangeAspect="1"/>
           </p:cNvPicPr>
@@ -2122,7 +2122,7 @@
       </p:sp>
       <p:pic>
         <p:nvPicPr>
-          <p:cNvPr id="3" name="Image 0" descr="preencoded.png">    </p:cNvPr>
+          <p:cNvPr id="3" name="Image 0" descr="preencoded.png"/>
           <p:cNvPicPr>
             <a:picLocks noChangeAspect="1"/>
           </p:cNvPicPr>
@@ -2308,7 +2308,7 @@
       </p:sp>
       <p:pic>
         <p:nvPicPr>
-          <p:cNvPr id="9" name="Image 1" descr="preencoded.png">    </p:cNvPr>
+          <p:cNvPr id="9" name="Image 1" descr="preencoded.png"/>
           <p:cNvPicPr>
             <a:picLocks noChangeAspect="1"/>
           </p:cNvPicPr>
@@ -2474,7 +2474,7 @@
       </p:sp>
       <p:pic>
         <p:nvPicPr>
-          <p:cNvPr id="14" name="Image 2" descr="preencoded.png">    </p:cNvPr>
+          <p:cNvPr id="14" name="Image 2" descr="preencoded.png"/>
           <p:cNvPicPr>
             <a:picLocks noChangeAspect="1"/>
           </p:cNvPicPr>
@@ -2640,7 +2640,7 @@
       </p:sp>
       <p:pic>
         <p:nvPicPr>
-          <p:cNvPr id="19" name="Image 3" descr="preencoded.png">    </p:cNvPr>
+          <p:cNvPr id="19" name="Image 3" descr="preencoded.png"/>
           <p:cNvPicPr>
             <a:picLocks noChangeAspect="1"/>
           </p:cNvPicPr>
@@ -2886,7 +2886,7 @@
       </p:sp>
       <p:pic>
         <p:nvPicPr>
-          <p:cNvPr id="3" name="Image 0" descr="preencoded.png">    </p:cNvPr>
+          <p:cNvPr id="3" name="Image 0" descr="preencoded.png"/>
           <p:cNvPicPr>
             <a:picLocks noChangeAspect="1"/>
           </p:cNvPicPr>
@@ -3342,7 +3342,7 @@
       </p:sp>
       <p:pic>
         <p:nvPicPr>
-          <p:cNvPr id="3" name="Image 0" descr="preencoded.png">    </p:cNvPr>
+          <p:cNvPr id="3" name="Image 0" descr="preencoded.png"/>
           <p:cNvPicPr>
             <a:picLocks noChangeAspect="1"/>
           </p:cNvPicPr>
@@ -3670,7 +3670,7 @@
       </p:sp>
       <p:pic>
         <p:nvPicPr>
-          <p:cNvPr id="3" name="Image 0" descr="preencoded.png">    </p:cNvPr>
+          <p:cNvPr id="3" name="Image 0" descr="preencoded.png"/>
           <p:cNvPicPr>
             <a:picLocks noChangeAspect="1"/>
           </p:cNvPicPr>
@@ -3998,7 +3998,7 @@
       </p:sp>
       <p:pic>
         <p:nvPicPr>
-          <p:cNvPr id="3" name="Image 0" descr="preencoded.png">    </p:cNvPr>
+          <p:cNvPr id="3" name="Image 0" descr="preencoded.png"/>
           <p:cNvPicPr>
             <a:picLocks noChangeAspect="1"/>
           </p:cNvPicPr>
@@ -4964,7 +4964,7 @@
       </p:sp>
       <p:pic>
         <p:nvPicPr>
-          <p:cNvPr id="3" name="Image 0" descr="preencoded.png">    </p:cNvPr>
+          <p:cNvPr id="3" name="Image 0" descr="preencoded.png"/>
           <p:cNvPicPr>
             <a:picLocks noChangeAspect="1"/>
           </p:cNvPicPr>
@@ -5157,7 +5157,7 @@
       </p:sp>
       <p:pic>
         <p:nvPicPr>
-          <p:cNvPr id="9" name="Image 1" descr="preencoded.png">    </p:cNvPr>
+          <p:cNvPr id="9" name="Image 1" descr="preencoded.png"/>
           <p:cNvPicPr>
             <a:picLocks noChangeAspect="1"/>
           </p:cNvPicPr>
@@ -5664,7 +5664,7 @@
       </p:sp>
       <p:pic>
         <p:nvPicPr>
-          <p:cNvPr id="3" name="Image 0" descr="preencoded.png">    </p:cNvPr>
+          <p:cNvPr id="3" name="Image 0" descr="preencoded.png"/>
           <p:cNvPicPr>
             <a:picLocks noChangeAspect="1"/>
           </p:cNvPicPr>
@@ -6852,7 +6852,7 @@
       </p:sp>
       <p:pic>
         <p:nvPicPr>
-          <p:cNvPr id="3" name="Image 0" descr="preencoded.png">    </p:cNvPr>
+          <p:cNvPr id="3" name="Image 0" descr="preencoded.png"/>
           <p:cNvPicPr>
             <a:picLocks noChangeAspect="1"/>
           </p:cNvPicPr>
@@ -7533,7 +7533,7 @@
       </p:sp>
       <p:pic>
         <p:nvPicPr>
-          <p:cNvPr id="3" name="Image 0" descr="preencoded.png">    </p:cNvPr>
+          <p:cNvPr id="3" name="Image 0" descr="preencoded.png"/>
           <p:cNvPicPr>
             <a:picLocks noChangeAspect="1"/>
           </p:cNvPicPr>
@@ -7714,7 +7714,7 @@
       </p:sp>
       <p:pic>
         <p:nvPicPr>
-          <p:cNvPr id="9" name="Image 1" descr="preencoded.png">    </p:cNvPr>
+          <p:cNvPr id="9" name="Image 1" descr="preencoded.png"/>
           <p:cNvPicPr>
             <a:picLocks noChangeAspect="1"/>
           </p:cNvPicPr>
@@ -8201,7 +8201,7 @@
       </p:sp>
       <p:pic>
         <p:nvPicPr>
-          <p:cNvPr id="3" name="Image 0" descr="preencoded.png">    </p:cNvPr>
+          <p:cNvPr id="3" name="Image 0" descr="preencoded.png"/>
           <p:cNvPicPr>
             <a:picLocks noChangeAspect="1"/>
           </p:cNvPicPr>
@@ -8882,7 +8882,7 @@
       </p:sp>
       <p:pic>
         <p:nvPicPr>
-          <p:cNvPr id="3" name="Image 0" descr="preencoded.png">    </p:cNvPr>
+          <p:cNvPr id="3" name="Image 0" descr="preencoded.png"/>
           <p:cNvPicPr>
             <a:picLocks noChangeAspect="1"/>
           </p:cNvPicPr>
@@ -9063,7 +9063,7 @@
       </p:sp>
       <p:pic>
         <p:nvPicPr>
-          <p:cNvPr id="9" name="Image 1" descr="preencoded.png">    </p:cNvPr>
+          <p:cNvPr id="9" name="Image 1" descr="preencoded.png"/>
           <p:cNvPicPr>
             <a:picLocks noChangeAspect="1"/>
           </p:cNvPicPr>
@@ -9550,7 +9550,7 @@
       </p:sp>
       <p:pic>
         <p:nvPicPr>
-          <p:cNvPr id="3" name="Image 0" descr="preencoded.png">    </p:cNvPr>
+          <p:cNvPr id="3" name="Image 0" descr="preencoded.png"/>
           <p:cNvPicPr>
             <a:picLocks noChangeAspect="1"/>
           </p:cNvPicPr>
@@ -9736,7 +9736,7 @@
       </p:sp>
       <p:pic>
         <p:nvPicPr>
-          <p:cNvPr id="9" name="Image 1" descr="preencoded.png">    </p:cNvPr>
+          <p:cNvPr id="9" name="Image 1" descr="preencoded.png"/>
           <p:cNvPicPr>
             <a:picLocks noChangeAspect="1"/>
           </p:cNvPicPr>
@@ -9902,7 +9902,7 @@
       </p:sp>
       <p:pic>
         <p:nvPicPr>
-          <p:cNvPr id="14" name="Image 2" descr="preencoded.png">    </p:cNvPr>
+          <p:cNvPr id="14" name="Image 2" descr="preencoded.png"/>
           <p:cNvPicPr>
             <a:picLocks noChangeAspect="1"/>
           </p:cNvPicPr>
@@ -10068,7 +10068,7 @@
       </p:sp>
       <p:pic>
         <p:nvPicPr>
-          <p:cNvPr id="19" name="Image 3" descr="preencoded.png">    </p:cNvPr>
+          <p:cNvPr id="19" name="Image 3" descr="preencoded.png"/>
           <p:cNvPicPr>
             <a:picLocks noChangeAspect="1"/>
           </p:cNvPicPr>
@@ -10363,7 +10363,7 @@
       </p:sp>
       <p:pic>
         <p:nvPicPr>
-          <p:cNvPr id="3" name="Image 0" descr="preencoded.png">    </p:cNvPr>
+          <p:cNvPr id="3" name="Image 0" descr="preencoded.png"/>
           <p:cNvPicPr>
             <a:picLocks noChangeAspect="1"/>
           </p:cNvPicPr>
@@ -10549,7 +10549,7 @@
       </p:sp>
       <p:pic>
         <p:nvPicPr>
-          <p:cNvPr id="9" name="Image 1" descr="preencoded.png">    </p:cNvPr>
+          <p:cNvPr id="9" name="Image 1" descr="preencoded.png"/>
           <p:cNvPicPr>
             <a:picLocks noChangeAspect="1"/>
           </p:cNvPicPr>
@@ -10715,7 +10715,7 @@
       </p:sp>
       <p:pic>
         <p:nvPicPr>
-          <p:cNvPr id="14" name="Image 2" descr="preencoded.png">    </p:cNvPr>
+          <p:cNvPr id="14" name="Image 2" descr="preencoded.png"/>
           <p:cNvPicPr>
             <a:picLocks noChangeAspect="1"/>
           </p:cNvPicPr>
@@ -10881,7 +10881,7 @@
       </p:sp>
       <p:pic>
         <p:nvPicPr>
-          <p:cNvPr id="19" name="Image 3" descr="preencoded.png">    </p:cNvPr>
+          <p:cNvPr id="19" name="Image 3" descr="preencoded.png"/>
           <p:cNvPicPr>
             <a:picLocks noChangeAspect="1"/>
           </p:cNvPicPr>
@@ -11047,7 +11047,7 @@
       </p:sp>
       <p:pic>
         <p:nvPicPr>
-          <p:cNvPr id="24" name="Image 4" descr="preencoded.png">    </p:cNvPr>
+          <p:cNvPr id="24" name="Image 4" descr="preencoded.png"/>
           <p:cNvPicPr>
             <a:picLocks noChangeAspect="1"/>
           </p:cNvPicPr>
@@ -11303,7 +11303,7 @@
       </p:sp>
       <p:pic>
         <p:nvPicPr>
-          <p:cNvPr id="3" name="Image 0" descr="preencoded.png">    </p:cNvPr>
+          <p:cNvPr id="3" name="Image 0" descr="preencoded.png"/>
           <p:cNvPicPr>
             <a:picLocks noChangeAspect="1"/>
           </p:cNvPicPr>
@@ -11489,7 +11489,7 @@
       </p:sp>
       <p:pic>
         <p:nvPicPr>
-          <p:cNvPr id="9" name="Image 1" descr="preencoded.png">    </p:cNvPr>
+          <p:cNvPr id="9" name="Image 1" descr="preencoded.png"/>
           <p:cNvPicPr>
             <a:picLocks noChangeAspect="1"/>
           </p:cNvPicPr>
@@ -11655,7 +11655,7 @@
       </p:sp>
       <p:pic>
         <p:nvPicPr>
-          <p:cNvPr id="14" name="Image 2" descr="preencoded.png">    </p:cNvPr>
+          <p:cNvPr id="14" name="Image 2" descr="preencoded.png"/>
           <p:cNvPicPr>
             <a:picLocks noChangeAspect="1"/>
           </p:cNvPicPr>
